--- a/docs/TRON2026_intro_slides.pptx
+++ b/docs/TRON2026_intro_slides.pptx
@@ -3236,7 +3236,7 @@
                 <a:ea typeface="Cambria" pitchFamily="34" charset="-122"/>
                 <a:cs typeface="Cambria" pitchFamily="34" charset="-120"/>
               </a:rPr>
-              <a:t>1.71×</a:t>
+              <a:t>1.79×</a:t>
             </a:r>
             <a:endParaRPr lang="en-US" sz="3200" dirty="0"/>
           </a:p>
@@ -6255,7 +6255,7 @@
                 <a:ea typeface="Calibri" pitchFamily="34" charset="-122"/>
                 <a:cs typeface="Calibri" pitchFamily="34" charset="-120"/>
               </a:rPr>
-              <a:t>40.1 %</a:t>
+              <a:t>42.0 %</a:t>
             </a:r>
             <a:endParaRPr lang="en-US" sz="1400" dirty="0"/>
           </a:p>
@@ -8705,7 +8705,7 @@
                 <a:ea typeface="Calibri" pitchFamily="34" charset="-122"/>
                 <a:cs typeface="Calibri" pitchFamily="34" charset="-120"/>
               </a:rPr>
-              <a:t>The deadline is derived from the application, not tuned to the answer. The convergence transient and its deadline misses are reported, not hidden behind a settled average.</a:t>
+              <a:t>The deadline is derived from the application, not tuned to the answer. Under live pipeline load the converged mask ran every traced inference at 101 ms, while static FP32 was over on all 45 of its.</a:t>
             </a:r>
             <a:endParaRPr lang="en-US" sz="1250" dirty="0"/>
           </a:p>
@@ -8783,7 +8783,7 @@
                 <a:ea typeface="Calibri" pitchFamily="34" charset="-122"/>
                 <a:cs typeface="Calibri" pitchFamily="34" charset="-120"/>
               </a:rPr>
-              <a:t>held in the steady state</a:t>
+              <a:t>held under live load</a:t>
             </a:r>
             <a:endParaRPr lang="en-US" sz="1200" dirty="0"/>
           </a:p>
@@ -8984,7 +8984,7 @@
                 <a:ea typeface="Cambria" pitchFamily="34" charset="-122"/>
                 <a:cs typeface="Cambria" pitchFamily="34" charset="-120"/>
               </a:rPr>
-              <a:t>1.71×</a:t>
+              <a:t>1.79×</a:t>
             </a:r>
             <a:endParaRPr lang="en-US" sz="3000" dirty="0"/>
           </a:p>

--- a/docs/TRON2026_intro_slides.pptx
+++ b/docs/TRON2026_intro_slides.pptx
@@ -2846,7 +2846,7 @@
                 <a:ea typeface="Calibri" pitchFamily="34" charset="-122"/>
                 <a:cs typeface="Calibri" pitchFamily="34" charset="-120"/>
               </a:rPr>
-              <a:t>The program plan listed secure world weight isolation as a stretch goal. It is not implemented, and the deviation is documented rather than glossed over.</a:t>
+              <a:t>The program plan promised secure world weight isolation in section 6.6. It was cut as separable from the co-optimisation thesis, and the descope is documented rather than glossed over.</a:t>
             </a:r>
             <a:endParaRPr lang="en-US" sz="1250" dirty="0"/>
           </a:p>

--- a/docs/TRON2026_intro_slides.pptx
+++ b/docs/TRON2026_intro_slides.pptx
@@ -1978,7 +1978,7 @@
                 <a:ea typeface="Cambria" pitchFamily="34" charset="-122"/>
                 <a:cs typeface="Cambria" pitchFamily="34" charset="-120"/>
               </a:rPr>
-              <a:t>98.2 ms</a:t>
+              <a:t>95.9 ms</a:t>
             </a:r>
             <a:endParaRPr lang="en-US" sz="2600" dirty="0"/>
           </a:p>
@@ -3158,7 +3158,7 @@
                 <a:ea typeface="Cambria" pitchFamily="34" charset="-122"/>
                 <a:cs typeface="Cambria" pitchFamily="34" charset="-120"/>
               </a:rPr>
-              <a:t>98.2 ms</a:t>
+              <a:t>95.9 ms</a:t>
             </a:r>
             <a:endParaRPr lang="en-US" sz="3200" dirty="0"/>
           </a:p>
@@ -3236,7 +3236,7 @@
                 <a:ea typeface="Cambria" pitchFamily="34" charset="-122"/>
                 <a:cs typeface="Cambria" pitchFamily="34" charset="-120"/>
               </a:rPr>
-              <a:t>1.79×</a:t>
+              <a:t>1.84×</a:t>
             </a:r>
             <a:endParaRPr lang="en-US" sz="3200" dirty="0"/>
           </a:p>
@@ -3997,7 +3997,7 @@
                 <a:ea typeface="Cambria" pitchFamily="34" charset="-122"/>
                 <a:cs typeface="Cambria" pitchFamily="34" charset="-120"/>
               </a:rPr>
-              <a:t>125.9</a:t>
+              <a:t>126.0</a:t>
             </a:r>
             <a:pPr algn="r" indent="0" marL="0">
               <a:buNone/>
@@ -4150,7 +4150,7 @@
                 <a:ea typeface="Cambria" pitchFamily="34" charset="-122"/>
                 <a:cs typeface="Cambria" pitchFamily="34" charset="-120"/>
               </a:rPr>
-              <a:t>101.5</a:t>
+              <a:t>99.3</a:t>
             </a:r>
             <a:pPr algn="r" indent="0" marL="0">
               <a:buNone/>
@@ -5821,7 +5821,7 @@
                 <a:ea typeface="Cambria" pitchFamily="34" charset="-122"/>
                 <a:cs typeface="Cambria" pitchFamily="34" charset="-120"/>
               </a:rPr>
-              <a:t>125.9 ms</a:t>
+              <a:t>126.0 ms</a:t>
             </a:r>
             <a:endParaRPr lang="en-US" sz="2000" dirty="0"/>
           </a:p>
@@ -5999,7 +5999,7 @@
                 <a:ea typeface="Cambria" pitchFamily="34" charset="-122"/>
                 <a:cs typeface="Cambria" pitchFamily="34" charset="-120"/>
               </a:rPr>
-              <a:t>101.5 ms</a:t>
+              <a:t>99.3 ms</a:t>
             </a:r>
             <a:endParaRPr lang="en-US" sz="2000" dirty="0"/>
           </a:p>
@@ -6077,7 +6077,7 @@
                 <a:ea typeface="Calibri" pitchFamily="34" charset="-122"/>
                 <a:cs typeface="Calibri" pitchFamily="34" charset="-120"/>
               </a:rPr>
-              <a:t>39.9 %</a:t>
+              <a:t>41.0 %</a:t>
             </a:r>
             <a:endParaRPr lang="en-US" sz="1400" dirty="0"/>
           </a:p>
@@ -6177,7 +6177,7 @@
                 <a:ea typeface="Cambria" pitchFamily="34" charset="-122"/>
                 <a:cs typeface="Cambria" pitchFamily="34" charset="-120"/>
               </a:rPr>
-              <a:t>98.2 ms</a:t>
+              <a:t>95.9 ms</a:t>
             </a:r>
             <a:endParaRPr lang="en-US" sz="2000" dirty="0"/>
           </a:p>
@@ -6255,7 +6255,7 @@
                 <a:ea typeface="Calibri" pitchFamily="34" charset="-122"/>
                 <a:cs typeface="Calibri" pitchFamily="34" charset="-120"/>
               </a:rPr>
-              <a:t>42.0 %</a:t>
+              <a:t>43.3 %</a:t>
             </a:r>
             <a:endParaRPr lang="en-US" sz="1400" dirty="0"/>
           </a:p>
@@ -6316,7 +6316,7 @@
                 <a:ea typeface="Cambria" pitchFamily="34" charset="-122"/>
                 <a:cs typeface="Cambria" pitchFamily="34" charset="-120"/>
               </a:rPr>
-              <a:t>98.2 ms</a:t>
+              <a:t>95.9 ms</a:t>
             </a:r>
             <a:endParaRPr lang="en-US" sz="4400" dirty="0"/>
           </a:p>
@@ -6673,7 +6673,7 @@
                 <a:ea typeface="Calibri" pitchFamily="34" charset="-122"/>
                 <a:cs typeface="Calibri" pitchFamily="34" charset="-120"/>
               </a:rPr>
-              <a:t>57 percent slower in INT8, their kernels cannot pack</a:t>
+              <a:t>43 percent slower in INT8, their kernels cannot pack</a:t>
             </a:r>
             <a:endParaRPr lang="en-US" sz="1250" dirty="0"/>
           </a:p>
@@ -6776,7 +6776,7 @@
                 <a:ea typeface="Calibri" pitchFamily="34" charset="-122"/>
                 <a:cs typeface="Calibri" pitchFamily="34" charset="-120"/>
               </a:rPr>
-              <a:t>32 percent faster in INT8, packed SXTB16 and SMLAD</a:t>
+              <a:t>38 percent faster in INT8, packed SXTB16 and SMLAD</a:t>
             </a:r>
             <a:endParaRPr lang="en-US" sz="1250" dirty="0"/>
           </a:p>
@@ -8984,7 +8984,7 @@
                 <a:ea typeface="Cambria" pitchFamily="34" charset="-122"/>
                 <a:cs typeface="Cambria" pitchFamily="34" charset="-120"/>
               </a:rPr>
-              <a:t>1.79×</a:t>
+              <a:t>1.84×</a:t>
             </a:r>
             <a:endParaRPr lang="en-US" sz="3000" dirty="0"/>
           </a:p>

--- a/docs/TRON2026_intro_slides.pptx
+++ b/docs/TRON2026_intro_slides.pptx
@@ -688,7 +688,7 @@
           <a:p>
             <a:r>
               <a:rPr lang="en-US" dirty="0"/>
-              <a:t>Open source, reproducible from the board alone.</a:t>
+              <a:t>The strongest form of the reuse claim: not that the code is tidy, but that the result was tested for what it depends on. Removing the DSP extension was expected to destroy the inversion and did not, which is how we learned it is structural to depthwise convolution rather than a gap in the kernel library.</a:t>
             </a:r>
             <a:endParaRPr lang="en-US" dirty="0"/>
           </a:p>
@@ -3052,24 +3052,24 @@
         </p:nvSpPr>
         <p:spPr>
           <a:xfrm>
-            <a:off x="640080" y="1325880"/>
-            <a:ext cx="8778240" cy="731520"/>
-          </a:xfrm>
-          <a:prstGeom prst="rect">
-            <a:avLst/>
-          </a:prstGeom>
-          <a:noFill/>
-          <a:ln/>
-        </p:spPr>
-        <p:txBody>
-          <a:bodyPr wrap="square" lIns="0" tIns="0" rIns="0" bIns="0" rtlCol="0" anchor="t"/>
-          <a:lstStyle/>
-          <a:p>
-            <a:pPr indent="0" marL="0">
-              <a:buNone/>
-            </a:pPr>
-            <a:r>
-              <a:rPr lang="en-US" sz="4000" b="1" dirty="0">
+            <a:off x="640080" y="1051560"/>
+            <a:ext cx="8778240" cy="685800"/>
+          </a:xfrm>
+          <a:prstGeom prst="rect">
+            <a:avLst/>
+          </a:prstGeom>
+          <a:noFill/>
+          <a:ln/>
+        </p:spPr>
+        <p:txBody>
+          <a:bodyPr wrap="square" lIns="0" tIns="0" rIns="0" bIns="0" rtlCol="0" anchor="t"/>
+          <a:lstStyle/>
+          <a:p>
+            <a:pPr indent="0" marL="0">
+              <a:buNone/>
+            </a:pPr>
+            <a:r>
+              <a:rPr lang="en-US" sz="3800" b="1" dirty="0">
                 <a:solidFill>
                   <a:srgbClr val="FFFFFF"/>
                 </a:solidFill>
@@ -3077,9 +3077,9 @@
                 <a:ea typeface="Cambria" pitchFamily="34" charset="-122"/>
                 <a:cs typeface="Cambria" pitchFamily="34" charset="-120"/>
               </a:rPr>
-              <a:t>A template, not a one off</a:t>
-            </a:r>
-            <a:endParaRPr lang="en-US" sz="4000" dirty="0"/>
+              <a:t>What this generalises to</a:t>
+            </a:r>
+            <a:endParaRPr lang="en-US" sz="3800" dirty="0"/>
           </a:p>
         </p:txBody>
       </p:sp>
@@ -3091,27 +3091,24 @@
         </p:nvSpPr>
         <p:spPr>
           <a:xfrm>
-            <a:off x="640080" y="2286000"/>
-            <a:ext cx="7680960" cy="1371600"/>
-          </a:xfrm>
-          <a:prstGeom prst="rect">
-            <a:avLst/>
-          </a:prstGeom>
-          <a:noFill/>
-          <a:ln/>
-        </p:spPr>
-        <p:txBody>
-          <a:bodyPr wrap="square" lIns="0" tIns="0" rIns="0" bIns="0" rtlCol="0" anchor="t"/>
-          <a:lstStyle/>
-          <a:p>
-            <a:pPr indent="0" marL="0">
-              <a:lnSpc>
-                <a:spcPct val="125000"/>
-              </a:lnSpc>
-              <a:buNone/>
-            </a:pPr>
-            <a:r>
-              <a:rPr lang="en-US" sz="1600" dirty="0">
+            <a:off x="640080" y="1847088"/>
+            <a:ext cx="8778240" cy="457200"/>
+          </a:xfrm>
+          <a:prstGeom prst="rect">
+            <a:avLst/>
+          </a:prstGeom>
+          <a:noFill/>
+          <a:ln/>
+        </p:spPr>
+        <p:txBody>
+          <a:bodyPr wrap="square" lIns="0" tIns="0" rIns="0" bIns="0" rtlCol="0" anchor="t"/>
+          <a:lstStyle/>
+          <a:p>
+            <a:pPr indent="0" marL="0">
+              <a:buNone/>
+            </a:pPr>
+            <a:r>
+              <a:rPr lang="en-US" sz="1500" dirty="0">
                 <a:solidFill>
                   <a:srgbClr val="CADCFC"/>
                 </a:solidFill>
@@ -3119,38 +3116,60 @@
                 <a:ea typeface="Calibri" pitchFamily="34" charset="-122"/>
                 <a:cs typeface="Calibri" pitchFamily="34" charset="-120"/>
               </a:rPr>
-              <a:t>The signal source is one interface with two implementations, and the pipeline above it does not know where samples come from. The task graph and the adaptation primitives carry over to any sensor domain: vibration, audio, temperature, biosignals.</a:t>
-            </a:r>
-            <a:endParaRPr lang="en-US" sz="1600" dirty="0"/>
-          </a:p>
-        </p:txBody>
-      </p:sp>
-      <p:sp>
-        <p:nvSpPr>
-          <p:cNvPr id="6" name="Text 4"/>
-          <p:cNvSpPr txBox="1"/>
-          <p:nvPr/>
-        </p:nvSpPr>
-        <p:spPr>
-          <a:xfrm>
-            <a:off x="640080" y="3977640"/>
-            <a:ext cx="2560320" cy="566928"/>
-          </a:xfrm>
-          <a:prstGeom prst="rect">
-            <a:avLst/>
-          </a:prstGeom>
-          <a:noFill/>
-          <a:ln/>
-        </p:spPr>
-        <p:txBody>
-          <a:bodyPr wrap="square" lIns="0" tIns="0" rIns="0" bIns="0" rtlCol="0" anchor="t"/>
-          <a:lstStyle/>
-          <a:p>
-            <a:pPr indent="0" marL="0">
-              <a:buNone/>
-            </a:pPr>
-            <a:r>
-              <a:rPr lang="en-US" sz="3200" b="1" dirty="0">
+              <a:t>The operating point is a property of relative per layer cost, and of nothing else. Three experiments pin that down.</a:t>
+            </a:r>
+            <a:endParaRPr lang="en-US" sz="1500" dirty="0"/>
+          </a:p>
+        </p:txBody>
+      </p:sp>
+      <p:sp>
+        <p:nvSpPr>
+          <p:cNvPr id="6" name="Shape 4"/>
+          <p:cNvSpPr/>
+          <p:nvPr/>
+        </p:nvSpPr>
+        <p:spPr>
+          <a:xfrm>
+            <a:off x="640080" y="2487168"/>
+            <a:ext cx="3456432" cy="2286000"/>
+          </a:xfrm>
+          <a:prstGeom prst="roundRect">
+            <a:avLst>
+              <a:gd name="adj" fmla="val 4000"/>
+            </a:avLst>
+          </a:prstGeom>
+          <a:solidFill>
+            <a:srgbClr val="27306E"/>
+          </a:solidFill>
+          <a:ln/>
+        </p:spPr>
+      </p:sp>
+      <p:sp>
+        <p:nvSpPr>
+          <p:cNvPr id="7" name="Text 5"/>
+          <p:cNvSpPr txBox="1"/>
+          <p:nvPr/>
+        </p:nvSpPr>
+        <p:spPr>
+          <a:xfrm>
+            <a:off x="914400" y="2724912"/>
+            <a:ext cx="2907792" cy="731520"/>
+          </a:xfrm>
+          <a:prstGeom prst="rect">
+            <a:avLst/>
+          </a:prstGeom>
+          <a:noFill/>
+          <a:ln/>
+        </p:spPr>
+        <p:txBody>
+          <a:bodyPr wrap="square" lIns="0" tIns="0" rIns="0" bIns="0" rtlCol="0" anchor="t"/>
+          <a:lstStyle/>
+          <a:p>
+            <a:pPr indent="0" marL="0">
+              <a:buNone/>
+            </a:pPr>
+            <a:r>
+              <a:rPr lang="en-US" sz="1500" b="1" dirty="0">
                 <a:solidFill>
                   <a:srgbClr val="F6AE2D"/>
                 </a:solidFill>
@@ -3158,38 +3177,41 @@
                 <a:ea typeface="Cambria" pitchFamily="34" charset="-122"/>
                 <a:cs typeface="Cambria" pitchFamily="34" charset="-120"/>
               </a:rPr>
-              <a:t>95.9 ms</a:t>
-            </a:r>
-            <a:endParaRPr lang="en-US" sz="3200" dirty="0"/>
-          </a:p>
-        </p:txBody>
-      </p:sp>
-      <p:sp>
-        <p:nvSpPr>
-          <p:cNvPr id="7" name="Text 5"/>
-          <p:cNvSpPr txBox="1"/>
-          <p:nvPr/>
-        </p:nvSpPr>
-        <p:spPr>
-          <a:xfrm>
-            <a:off x="640080" y="4572000"/>
-            <a:ext cx="2560320" cy="320040"/>
-          </a:xfrm>
-          <a:prstGeom prst="rect">
-            <a:avLst/>
-          </a:prstGeom>
-          <a:noFill/>
-          <a:ln/>
-        </p:spPr>
-        <p:txBody>
-          <a:bodyPr wrap="square" lIns="0" tIns="0" rIns="0" bIns="0" rtlCol="0" anchor="t"/>
-          <a:lstStyle/>
-          <a:p>
-            <a:pPr indent="0" marL="0">
-              <a:buNone/>
-            </a:pPr>
-            <a:r>
-              <a:rPr lang="en-US" sz="1300" dirty="0">
+              <a:t>Remove the DSP extension</a:t>
+            </a:r>
+            <a:endParaRPr lang="en-US" sz="1500" dirty="0"/>
+          </a:p>
+        </p:txBody>
+      </p:sp>
+      <p:sp>
+        <p:nvSpPr>
+          <p:cNvPr id="8" name="Text 6"/>
+          <p:cNvSpPr txBox="1"/>
+          <p:nvPr/>
+        </p:nvSpPr>
+        <p:spPr>
+          <a:xfrm>
+            <a:off x="914400" y="3456432"/>
+            <a:ext cx="2907792" cy="1188720"/>
+          </a:xfrm>
+          <a:prstGeom prst="rect">
+            <a:avLst/>
+          </a:prstGeom>
+          <a:noFill/>
+          <a:ln/>
+        </p:spPr>
+        <p:txBody>
+          <a:bodyPr wrap="square" lIns="0" tIns="0" rIns="0" bIns="0" rtlCol="0" anchor="t"/>
+          <a:lstStyle/>
+          <a:p>
+            <a:pPr indent="0" marL="0">
+              <a:lnSpc>
+                <a:spcPct val="115000"/>
+              </a:lnSpc>
+              <a:buNone/>
+            </a:pPr>
+            <a:r>
+              <a:rPr lang="en-US" sz="1150" dirty="0">
                 <a:solidFill>
                   <a:srgbClr val="CADCFC"/>
                 </a:solidFill>
@@ -3197,38 +3219,60 @@
                 <a:ea typeface="Calibri" pitchFamily="34" charset="-122"/>
                 <a:cs typeface="Calibri" pitchFamily="34" charset="-120"/>
               </a:rPr>
-              <a:t>adaptive latency</a:t>
-            </a:r>
-            <a:endParaRPr lang="en-US" sz="1300" dirty="0"/>
-          </a:p>
-        </p:txBody>
-      </p:sp>
-      <p:sp>
-        <p:nvSpPr>
-          <p:cNvPr id="8" name="Text 6"/>
-          <p:cNvSpPr txBox="1"/>
-          <p:nvPr/>
-        </p:nvSpPr>
-        <p:spPr>
-          <a:xfrm>
-            <a:off x="3383280" y="3977640"/>
-            <a:ext cx="2560320" cy="566928"/>
-          </a:xfrm>
-          <a:prstGeom prst="rect">
-            <a:avLst/>
-          </a:prstGeom>
-          <a:noFill/>
-          <a:ln/>
-        </p:spPr>
-        <p:txBody>
-          <a:bodyPr wrap="square" lIns="0" tIns="0" rIns="0" bIns="0" rtlCol="0" anchor="t"/>
-          <a:lstStyle/>
-          <a:p>
-            <a:pPr indent="0" marL="0">
-              <a:buNone/>
-            </a:pPr>
-            <a:r>
-              <a:rPr lang="en-US" sz="3200" b="1" dirty="0">
+              <a:t>Same mask. The depthwise layers do not move, they never used the packed path. The inversion is structural to depthwise separable convolution, so it is there in MobileNet and DS-CNN alike.</a:t>
+            </a:r>
+            <a:endParaRPr lang="en-US" sz="1150" dirty="0"/>
+          </a:p>
+        </p:txBody>
+      </p:sp>
+      <p:sp>
+        <p:nvSpPr>
+          <p:cNvPr id="9" name="Shape 7"/>
+          <p:cNvSpPr/>
+          <p:nvPr/>
+        </p:nvSpPr>
+        <p:spPr>
+          <a:xfrm>
+            <a:off x="4352544" y="2487168"/>
+            <a:ext cx="3456432" cy="2286000"/>
+          </a:xfrm>
+          <a:prstGeom prst="roundRect">
+            <a:avLst>
+              <a:gd name="adj" fmla="val 4000"/>
+            </a:avLst>
+          </a:prstGeom>
+          <a:solidFill>
+            <a:srgbClr val="27306E"/>
+          </a:solidFill>
+          <a:ln/>
+        </p:spPr>
+      </p:sp>
+      <p:sp>
+        <p:nvSpPr>
+          <p:cNvPr id="10" name="Text 8"/>
+          <p:cNvSpPr txBox="1"/>
+          <p:nvPr/>
+        </p:nvSpPr>
+        <p:spPr>
+          <a:xfrm>
+            <a:off x="4626864" y="2724912"/>
+            <a:ext cx="2907792" cy="731520"/>
+          </a:xfrm>
+          <a:prstGeom prst="rect">
+            <a:avLst/>
+          </a:prstGeom>
+          <a:noFill/>
+          <a:ln/>
+        </p:spPr>
+        <p:txBody>
+          <a:bodyPr wrap="square" lIns="0" tIns="0" rIns="0" bIns="0" rtlCol="0" anchor="t"/>
+          <a:lstStyle/>
+          <a:p>
+            <a:pPr indent="0" marL="0">
+              <a:buNone/>
+            </a:pPr>
+            <a:r>
+              <a:rPr lang="en-US" sz="1500" b="1" dirty="0">
                 <a:solidFill>
                   <a:srgbClr val="F6AE2D"/>
                 </a:solidFill>
@@ -3236,38 +3280,41 @@
                 <a:ea typeface="Cambria" pitchFamily="34" charset="-122"/>
                 <a:cs typeface="Cambria" pitchFamily="34" charset="-120"/>
               </a:rPr>
-              <a:t>1.84×</a:t>
-            </a:r>
-            <a:endParaRPr lang="en-US" sz="3200" dirty="0"/>
-          </a:p>
-        </p:txBody>
-      </p:sp>
-      <p:sp>
-        <p:nvSpPr>
-          <p:cNvPr id="9" name="Text 7"/>
-          <p:cNvSpPr txBox="1"/>
-          <p:nvPr/>
-        </p:nvSpPr>
-        <p:spPr>
-          <a:xfrm>
-            <a:off x="3383280" y="4572000"/>
-            <a:ext cx="2560320" cy="320040"/>
-          </a:xfrm>
-          <a:prstGeom prst="rect">
-            <a:avLst/>
-          </a:prstGeom>
-          <a:noFill/>
-          <a:ln/>
-        </p:spPr>
-        <p:txBody>
-          <a:bodyPr wrap="square" lIns="0" tIns="0" rIns="0" bIns="0" rtlCol="0" anchor="t"/>
-          <a:lstStyle/>
-          <a:p>
-            <a:pPr indent="0" marL="0">
-              <a:buNone/>
-            </a:pPr>
-            <a:r>
-              <a:rPr lang="en-US" sz="1300" dirty="0">
+              <a:t>Double every cycle count</a:t>
+            </a:r>
+            <a:endParaRPr lang="en-US" sz="1500" dirty="0"/>
+          </a:p>
+        </p:txBody>
+      </p:sp>
+      <p:sp>
+        <p:nvSpPr>
+          <p:cNvPr id="11" name="Text 9"/>
+          <p:cNvSpPr txBox="1"/>
+          <p:nvPr/>
+        </p:nvSpPr>
+        <p:spPr>
+          <a:xfrm>
+            <a:off x="4626864" y="3456432"/>
+            <a:ext cx="2907792" cy="1188720"/>
+          </a:xfrm>
+          <a:prstGeom prst="rect">
+            <a:avLst/>
+          </a:prstGeom>
+          <a:noFill/>
+          <a:ln/>
+        </p:spPr>
+        <p:txBody>
+          <a:bodyPr wrap="square" lIns="0" tIns="0" rIns="0" bIns="0" rtlCol="0" anchor="t"/>
+          <a:lstStyle/>
+          <a:p>
+            <a:pPr indent="0" marL="0">
+              <a:lnSpc>
+                <a:spcPct val="115000"/>
+              </a:lnSpc>
+              <a:buNone/>
+            </a:pPr>
+            <a:r>
+              <a:rPr lang="en-US" sz="1150" dirty="0">
                 <a:solidFill>
                   <a:srgbClr val="CADCFC"/>
                 </a:solidFill>
@@ -3275,38 +3322,60 @@
                 <a:ea typeface="Calibri" pitchFamily="34" charset="-122"/>
                 <a:cs typeface="Calibri" pitchFamily="34" charset="-120"/>
               </a:rPr>
-              <a:t>longer asleep</a:t>
-            </a:r>
-            <a:endParaRPr lang="en-US" sz="1300" dirty="0"/>
-          </a:p>
-        </p:txBody>
-      </p:sp>
-      <p:sp>
-        <p:nvSpPr>
-          <p:cNvPr id="10" name="Text 8"/>
-          <p:cNvSpPr txBox="1"/>
-          <p:nvPr/>
-        </p:nvSpPr>
-        <p:spPr>
-          <a:xfrm>
-            <a:off x="6126480" y="3977640"/>
-            <a:ext cx="2560320" cy="566928"/>
-          </a:xfrm>
-          <a:prstGeom prst="rect">
-            <a:avLst/>
-          </a:prstGeom>
-          <a:noFill/>
-          <a:ln/>
-        </p:spPr>
-        <p:txBody>
-          <a:bodyPr wrap="square" lIns="0" tIns="0" rIns="0" bIns="0" rtlCol="0" anchor="t"/>
-          <a:lstStyle/>
-          <a:p>
-            <a:pPr indent="0" marL="0">
-              <a:buNone/>
-            </a:pPr>
-            <a:r>
-              <a:rPr lang="en-US" sz="3200" b="1" dirty="0">
+              <a:t>Same mask. A slower clock or a thermal throttle changes whether the deadline is met, never which configuration is cheapest.</a:t>
+            </a:r>
+            <a:endParaRPr lang="en-US" sz="1150" dirty="0"/>
+          </a:p>
+        </p:txBody>
+      </p:sp>
+      <p:sp>
+        <p:nvSpPr>
+          <p:cNvPr id="12" name="Shape 10"/>
+          <p:cNvSpPr/>
+          <p:nvPr/>
+        </p:nvSpPr>
+        <p:spPr>
+          <a:xfrm>
+            <a:off x="8065008" y="2487168"/>
+            <a:ext cx="3456432" cy="2286000"/>
+          </a:xfrm>
+          <a:prstGeom prst="roundRect">
+            <a:avLst>
+              <a:gd name="adj" fmla="val 4000"/>
+            </a:avLst>
+          </a:prstGeom>
+          <a:solidFill>
+            <a:srgbClr val="27306E"/>
+          </a:solidFill>
+          <a:ln/>
+        </p:spPr>
+      </p:sp>
+      <p:sp>
+        <p:nvSpPr>
+          <p:cNvPr id="13" name="Text 11"/>
+          <p:cNvSpPr txBox="1"/>
+          <p:nvPr/>
+        </p:nvSpPr>
+        <p:spPr>
+          <a:xfrm>
+            <a:off x="8339328" y="2724912"/>
+            <a:ext cx="2907792" cy="731520"/>
+          </a:xfrm>
+          <a:prstGeom prst="rect">
+            <a:avLst/>
+          </a:prstGeom>
+          <a:noFill/>
+          <a:ln/>
+        </p:spPr>
+        <p:txBody>
+          <a:bodyPr wrap="square" lIns="0" tIns="0" rIns="0" bIns="0" rtlCol="0" anchor="t"/>
+          <a:lstStyle/>
+          <a:p>
+            <a:pPr indent="0" marL="0">
+              <a:buNone/>
+            </a:pPr>
+            <a:r>
+              <a:rPr lang="en-US" sz="1500" b="1" dirty="0">
                 <a:solidFill>
                   <a:srgbClr val="F6AE2D"/>
                 </a:solidFill>
@@ -3314,38 +3383,41 @@
                 <a:ea typeface="Cambria" pitchFamily="34" charset="-122"/>
                 <a:cs typeface="Cambria" pitchFamily="34" charset="-120"/>
               </a:rPr>
-              <a:t>0</a:t>
-            </a:r>
-            <a:endParaRPr lang="en-US" sz="3200" dirty="0"/>
-          </a:p>
-        </p:txBody>
-      </p:sp>
-      <p:sp>
-        <p:nvSpPr>
-          <p:cNvPr id="11" name="Text 9"/>
-          <p:cNvSpPr txBox="1"/>
-          <p:nvPr/>
-        </p:nvSpPr>
-        <p:spPr>
-          <a:xfrm>
-            <a:off x="6126480" y="4572000"/>
-            <a:ext cx="2560320" cy="320040"/>
-          </a:xfrm>
-          <a:prstGeom prst="rect">
-            <a:avLst/>
-          </a:prstGeom>
-          <a:noFill/>
-          <a:ln/>
-        </p:spPr>
-        <p:txBody>
-          <a:bodyPr wrap="square" lIns="0" tIns="0" rIns="0" bIns="0" rtlCol="0" anchor="t"/>
-          <a:lstStyle/>
-          <a:p>
-            <a:pPr indent="0" marL="0">
-              <a:buNone/>
-            </a:pPr>
-            <a:r>
-              <a:rPr lang="en-US" sz="1300" dirty="0">
+              <a:t>Give depthwise a kernel that wins</a:t>
+            </a:r>
+            <a:endParaRPr lang="en-US" sz="1500" dirty="0"/>
+          </a:p>
+        </p:txBody>
+      </p:sp>
+      <p:sp>
+        <p:nvSpPr>
+          <p:cNvPr id="14" name="Text 12"/>
+          <p:cNvSpPr txBox="1"/>
+          <p:nvPr/>
+        </p:nvSpPr>
+        <p:spPr>
+          <a:xfrm>
+            <a:off x="8339328" y="3456432"/>
+            <a:ext cx="2907792" cy="1188720"/>
+          </a:xfrm>
+          <a:prstGeom prst="rect">
+            <a:avLst/>
+          </a:prstGeom>
+          <a:noFill/>
+          <a:ln/>
+        </p:spPr>
+        <p:txBody>
+          <a:bodyPr wrap="square" lIns="0" tIns="0" rIns="0" bIns="0" rtlCol="0" anchor="t"/>
+          <a:lstStyle/>
+          <a:p>
+            <a:pPr indent="0" marL="0">
+              <a:lnSpc>
+                <a:spcPct val="115000"/>
+              </a:lnSpc>
+              <a:buNone/>
+            </a:pPr>
+            <a:r>
+              <a:rPr lang="en-US" sz="1150" dirty="0">
                 <a:solidFill>
                   <a:srgbClr val="CADCFC"/>
                 </a:solidFill>
@@ -3353,7 +3425,46 @@
                 <a:ea typeface="Calibri" pitchFamily="34" charset="-122"/>
                 <a:cs typeface="Calibri" pitchFamily="34" charset="-120"/>
               </a:rPr>
-              <a:t>dropped blocks</a:t>
+              <a:t>Optimum collapses to plain INT8 in ten demotions. The mixed answer lasts exactly as long as the inversion, and the controller finds the new one unprompted.</a:t>
+            </a:r>
+            <a:endParaRPr lang="en-US" sz="1150" dirty="0"/>
+          </a:p>
+        </p:txBody>
+      </p:sp>
+      <p:sp>
+        <p:nvSpPr>
+          <p:cNvPr id="15" name="Text 13"/>
+          <p:cNvSpPr txBox="1"/>
+          <p:nvPr/>
+        </p:nvSpPr>
+        <p:spPr>
+          <a:xfrm>
+            <a:off x="640080" y="4956048"/>
+            <a:ext cx="10881360" cy="457200"/>
+          </a:xfrm>
+          <a:prstGeom prst="rect">
+            <a:avLst/>
+          </a:prstGeom>
+          <a:noFill/>
+          <a:ln/>
+        </p:spPr>
+        <p:txBody>
+          <a:bodyPr wrap="square" lIns="0" tIns="0" rIns="0" bIns="0" rtlCol="0" anchor="t"/>
+          <a:lstStyle/>
+          <a:p>
+            <a:pPr indent="0" marL="0">
+              <a:buNone/>
+            </a:pPr>
+            <a:r>
+              <a:rPr lang="en-US" sz="1300" i="1" dirty="0">
+                <a:solidFill>
+                  <a:srgbClr val="8FA2C4"/>
+                </a:solidFill>
+                <a:latin typeface="Calibri" pitchFamily="34" charset="0"/>
+                <a:ea typeface="Calibri" pitchFamily="34" charset="-122"/>
+                <a:cs typeface="Calibri" pitchFamily="34" charset="-120"/>
+              </a:rPr>
+              <a:t>To port it: swap the signal source behind one interface, the model, and the test for an interesting frame. Controller, calibration, deadline logic and weight streaming are untouched.</a:t>
             </a:r>
             <a:endParaRPr lang="en-US" sz="1300" dirty="0"/>
           </a:p>
@@ -3361,7 +3472,7 @@
       </p:sp>
       <p:sp>
         <p:nvSpPr>
-          <p:cNvPr id="12" name="Text 10"/>
+          <p:cNvPr id="16" name="Text 14"/>
           <p:cNvSpPr txBox="1"/>
           <p:nvPr/>
         </p:nvSpPr>
@@ -3400,7 +3511,7 @@
       </p:sp>
       <p:sp>
         <p:nvSpPr>
-          <p:cNvPr id="13" name="Text 11"/>
+          <p:cNvPr id="17" name="Text 15"/>
           <p:cNvSpPr txBox="1"/>
           <p:nvPr/>
         </p:nvSpPr>

--- a/docs/TRON2026_intro_slides.pptx
+++ b/docs/TRON2026_intro_slides.pptx
@@ -2226,7 +2226,7 @@
                 <a:ea typeface="Calibri" pitchFamily="34" charset="-122"/>
                 <a:cs typeface="Calibri" pitchFamily="34" charset="-120"/>
               </a:rPr>
-              <a:t>   Cortex-M33 at 250 MHz   ·   µT-Kernel 3.0   ·   keyword spotting   ·   open source, MIT</a:t>
+              <a:t>   Cortex-M33 at 250 MHz   ·   µT-Kernel 3.0   ·   keyword spotting   ·   project code MIT, kernel under T-License</a:t>
             </a:r>
             <a:endParaRPr lang="en-US" sz="1350" dirty="0"/>
           </a:p>
@@ -3542,7 +3542,7 @@
                 <a:ea typeface="Calibri" pitchFamily="34" charset="-122"/>
                 <a:cs typeface="Calibri" pitchFamily="34" charset="-120"/>
               </a:rPr>
-              <a:t>MIT licensed   ·   builds and reproduces every number from the board alone, no external hardware</a:t>
+              <a:t>Project code MIT, vendored µT-Kernel 3.0 under T-License 2.1 and 2.2   ·   reproduces every number from the board alone</a:t>
             </a:r>
             <a:endParaRPr lang="en-US" sz="1250" dirty="0"/>
           </a:p>
@@ -6665,7 +6665,7 @@
       </p:sp>
       <p:pic>
         <p:nvPicPr>
-          <p:cNvPr id="4" name="Image 0" descr="/Users/kushalsathyanarayan/Desktop/TRON/docs/figures/layer_inversion.png">    </p:cNvPr>
+          <p:cNvPr id="4" name="Image 0" descr="Measured cycles per layer, INT8 against FP32, with the four depthwise layers highlighted">    </p:cNvPr>
           <p:cNvPicPr>
             <a:picLocks noChangeAspect="1"/>
           </p:cNvPicPr>
@@ -7147,7 +7147,7 @@
       </p:sp>
       <p:pic>
         <p:nvPicPr>
-          <p:cNvPr id="4" name="Image 0" descr="/Users/kushalsathyanarayan/Desktop/TRON/docs/figures/convergence.png">    </p:cNvPr>
+          <p:cNvPr id="4" name="Image 0" descr="Controller latency per decision, demotions from full FP32 then promotions from all INT8 to the same mask">    </p:cNvPr>
           <p:cNvPicPr>
             <a:picLocks noChangeAspect="1"/>
           </p:cNvPicPr>
@@ -8816,7 +8816,7 @@
                 <a:ea typeface="Calibri" pitchFamily="34" charset="-122"/>
                 <a:cs typeface="Calibri" pitchFamily="34" charset="-120"/>
               </a:rPr>
-              <a:t>The deadline is derived from the application, not tuned to the answer. Under live pipeline load the converged mask ran every traced inference at 101 ms, while static FP32 was over on all 45 of its.</a:t>
+              <a:t>The deadline is derived from the application, not tuned to the answer. Under live pipeline load the converged mask ran every traced inference between 98.3 and 98.8 ms, while static FP32 was over on all 45 of its.</a:t>
             </a:r>
             <a:endParaRPr lang="en-US" sz="1250" dirty="0"/>
           </a:p>

--- a/docs/TRON2026_intro_slides.pptx
+++ b/docs/TRON2026_intro_slides.pptx
@@ -2478,7 +2478,7 @@
                 <a:ea typeface="Calibri" pitchFamily="34" charset="-122"/>
                 <a:cs typeface="Calibri" pitchFamily="34" charset="-120"/>
               </a:rPr>
-              <a:t>94.0 percent is core accuracy, scored on pre computed feature grids. End to end accuracy through capture, gate and features is 47 to 57 percent, and at this sample size the three configurations are not statistically separable.</a:t>
+              <a:t>94.0 percent is core accuracy on grids across all twelve classes. End to end through the pipeline is 98.8, 100 and 98.7 percent on three keywords and silence: no loss in the pipeline, not a better model.</a:t>
             </a:r>
             <a:endParaRPr lang="en-US" sz="1250" dirty="0"/>
           </a:p>
@@ -2559,7 +2559,7 @@
                 <a:ea typeface="Calibri" pitchFamily="34" charset="-122"/>
                 <a:cs typeface="Calibri" pitchFamily="34" charset="-120"/>
               </a:rPr>
-              <a:t>a wider replay corpus and a longer live phase</a:t>
+              <a:t>a replay corpus spanning all twelve classes</a:t>
             </a:r>
             <a:endParaRPr lang="en-US" sz="1250" dirty="0"/>
           </a:p>

--- a/docs/TRON2026_intro_slides.pptx
+++ b/docs/TRON2026_intro_slides.pptx
@@ -1978,7 +1978,7 @@
                 <a:ea typeface="Cambria" pitchFamily="34" charset="-122"/>
                 <a:cs typeface="Cambria" pitchFamily="34" charset="-120"/>
               </a:rPr>
-              <a:t>95.9 ms</a:t>
+              <a:t>86.1 ms</a:t>
             </a:r>
             <a:endParaRPr lang="en-US" sz="2600" dirty="0"/>
           </a:p>
@@ -2478,7 +2478,7 @@
                 <a:ea typeface="Calibri" pitchFamily="34" charset="-122"/>
                 <a:cs typeface="Calibri" pitchFamily="34" charset="-120"/>
               </a:rPr>
-              <a:t>94.0 percent is core accuracy on grids across all twelve classes. End to end through the pipeline is 98.8, 100 and 98.7 percent on three keywords and silence: no loss in the pipeline, not a better model.</a:t>
+              <a:t>94.0 percent is core accuracy on grids across all twelve classes. End to end through the pipeline is 98.9, 98.8 and 100 percent on three keywords and silence: no loss in the pipeline, not a better model.</a:t>
             </a:r>
             <a:endParaRPr lang="en-US" sz="1250" dirty="0"/>
           </a:p>
@@ -4108,7 +4108,7 @@
                 <a:ea typeface="Cambria" pitchFamily="34" charset="-122"/>
                 <a:cs typeface="Cambria" pitchFamily="34" charset="-120"/>
               </a:rPr>
-              <a:t>126.0</a:t>
+              <a:t>126.7</a:t>
             </a:r>
             <a:pPr algn="r" indent="0" marL="0">
               <a:buNone/>
@@ -4261,7 +4261,7 @@
                 <a:ea typeface="Cambria" pitchFamily="34" charset="-122"/>
                 <a:cs typeface="Cambria" pitchFamily="34" charset="-120"/>
               </a:rPr>
-              <a:t>99.3</a:t>
+              <a:t>93.4</a:t>
             </a:r>
             <a:pPr algn="r" indent="0" marL="0">
               <a:buNone/>
@@ -5932,7 +5932,7 @@
                 <a:ea typeface="Cambria" pitchFamily="34" charset="-122"/>
                 <a:cs typeface="Cambria" pitchFamily="34" charset="-120"/>
               </a:rPr>
-              <a:t>126.0 ms</a:t>
+              <a:t>126.7 ms</a:t>
             </a:r>
             <a:endParaRPr lang="en-US" sz="2000" dirty="0"/>
           </a:p>
@@ -6010,7 +6010,7 @@
                 <a:ea typeface="Calibri" pitchFamily="34" charset="-122"/>
                 <a:cs typeface="Calibri" pitchFamily="34" charset="-120"/>
               </a:rPr>
-              <a:t>23.5 %</a:t>
+              <a:t>23.6 %</a:t>
             </a:r>
             <a:endParaRPr lang="en-US" sz="1400" dirty="0"/>
           </a:p>
@@ -6110,7 +6110,7 @@
                 <a:ea typeface="Cambria" pitchFamily="34" charset="-122"/>
                 <a:cs typeface="Cambria" pitchFamily="34" charset="-120"/>
               </a:rPr>
-              <a:t>99.3 ms</a:t>
+              <a:t>93.4 ms</a:t>
             </a:r>
             <a:endParaRPr lang="en-US" sz="2000" dirty="0"/>
           </a:p>
@@ -6188,7 +6188,7 @@
                 <a:ea typeface="Calibri" pitchFamily="34" charset="-122"/>
                 <a:cs typeface="Calibri" pitchFamily="34" charset="-120"/>
               </a:rPr>
-              <a:t>41.0 %</a:t>
+              <a:t>42.5 %</a:t>
             </a:r>
             <a:endParaRPr lang="en-US" sz="1400" dirty="0"/>
           </a:p>
@@ -6288,7 +6288,7 @@
                 <a:ea typeface="Cambria" pitchFamily="34" charset="-122"/>
                 <a:cs typeface="Cambria" pitchFamily="34" charset="-120"/>
               </a:rPr>
-              <a:t>95.9 ms</a:t>
+              <a:t>86.1 ms</a:t>
             </a:r>
             <a:endParaRPr lang="en-US" sz="2000" dirty="0"/>
           </a:p>
@@ -6366,7 +6366,7 @@
                 <a:ea typeface="Calibri" pitchFamily="34" charset="-122"/>
                 <a:cs typeface="Calibri" pitchFamily="34" charset="-120"/>
               </a:rPr>
-              <a:t>43.3 %</a:t>
+              <a:t>49.8 %</a:t>
             </a:r>
             <a:endParaRPr lang="en-US" sz="1400" dirty="0"/>
           </a:p>
@@ -6427,7 +6427,7 @@
                 <a:ea typeface="Cambria" pitchFamily="34" charset="-122"/>
                 <a:cs typeface="Cambria" pitchFamily="34" charset="-120"/>
               </a:rPr>
-              <a:t>95.9 ms</a:t>
+              <a:t>86.1 ms</a:t>
             </a:r>
             <a:endParaRPr lang="en-US" sz="4400" dirty="0"/>
           </a:p>
@@ -6784,7 +6784,7 @@
                 <a:ea typeface="Calibri" pitchFamily="34" charset="-122"/>
                 <a:cs typeface="Calibri" pitchFamily="34" charset="-120"/>
               </a:rPr>
-              <a:t>43 percent slower in INT8, their kernels cannot pack</a:t>
+              <a:t>40 percent slower in INT8, their kernels cannot pack</a:t>
             </a:r>
             <a:endParaRPr lang="en-US" sz="1250" dirty="0"/>
           </a:p>
@@ -6887,7 +6887,7 @@
                 <a:ea typeface="Calibri" pitchFamily="34" charset="-122"/>
                 <a:cs typeface="Calibri" pitchFamily="34" charset="-120"/>
               </a:rPr>
-              <a:t>38 percent faster in INT8, packed SXTB16 and SMLAD</a:t>
+              <a:t>44 percent faster in INT8, packed SXTB16 and SMLAD</a:t>
             </a:r>
             <a:endParaRPr lang="en-US" sz="1250" dirty="0"/>
           </a:p>
@@ -9095,7 +9095,7 @@
                 <a:ea typeface="Cambria" pitchFamily="34" charset="-122"/>
                 <a:cs typeface="Cambria" pitchFamily="34" charset="-120"/>
               </a:rPr>
-              <a:t>1.84×</a:t>
+              <a:t>2.11×</a:t>
             </a:r>
             <a:endParaRPr lang="en-US" sz="3000" dirty="0"/>
           </a:p>

--- a/docs/TRON2026_intro_slides.pptx
+++ b/docs/TRON2026_intro_slides.pptx
@@ -16,9 +16,10 @@
     <p:sldId id="264" r:id="rId10"/>
     <p:sldId id="265" r:id="rId11"/>
     <p:sldId id="266" r:id="rId12"/>
+    <p:sldId id="267" r:id="rId13"/>
   </p:sldIdLst>
   <p:notesMasterIdLst>
-    <p:notesMasterId r:id="rId13"/>
+    <p:notesMasterId r:id="rId14"/>
   </p:notesMasterIdLst>
   <p:sldSz cx="12192000" cy="6858000"/>
   <p:notesSz cx="6858000" cy="12192000"/>
@@ -688,7 +689,7 @@
           <a:p>
             <a:r>
               <a:rPr lang="en-US" dirty="0"/>
-              <a:t>The strongest form of the reuse claim: not that the code is tidy, but that the result was tested for what it depends on. Removing the DSP extension was expected to destroy the inversion and did not, which is how we learned it is structural to depthwise convolution rather than a gap in the kernel library.</a:t>
+              <a:t>Each group is a line of prior work this project builds on or departs from. What is new here is where the loop sits: inside the RTOS on the microcontroller, per layer, driven by cycles measured on the silicon.</a:t>
             </a:r>
             <a:endParaRPr lang="en-US" dirty="0"/>
           </a:p>
@@ -712,6 +713,94 @@
             <a:fld id="{F7021451-1387-4CA6-816F-3879F97B5CBC}" type="slidenum">
               <a:rPr lang="en-US"/>
               <a:t>11</a:t>
+            </a:fld>
+            <a:endParaRPr lang="en-US"/>
+          </a:p>
+        </p:txBody>
+      </p:sp>
+    </p:spTree>
+    <p:extLst>
+      <p:ext uri="{BB962C8B-B14F-4D97-AF65-F5344CB8AC3E}">
+        <p14:creationId xmlns:p14="http://schemas.microsoft.com/office/powerpoint/2010/main" val="1024086991"/>
+      </p:ext>
+    </p:extLst>
+  </p:cSld>
+  <p:clrMapOvr>
+    <a:masterClrMapping/>
+  </p:clrMapOvr>
+</p:notes>
+</file>
+
+<file path=ppt/notesSlides/notesSlide12.xml><?xml version="1.0" encoding="utf-8"?>
+<p:notes xmlns:a="http://schemas.openxmlformats.org/drawingml/2006/main" xmlns:r="http://schemas.openxmlformats.org/officeDocument/2006/relationships" xmlns:p="http://schemas.openxmlformats.org/presentationml/2006/main">
+  <p:cSld>
+    <p:spTree>
+      <p:nvGrpSpPr>
+        <p:cNvPr id="1" name=""/>
+        <p:cNvGrpSpPr/>
+        <p:nvPr/>
+      </p:nvGrpSpPr>
+      <p:grpSpPr>
+        <a:xfrm>
+          <a:off x="0" y="0"/>
+          <a:ext cx="0" cy="0"/>
+          <a:chOff x="0" y="0"/>
+          <a:chExt cx="0" cy="0"/>
+        </a:xfrm>
+      </p:grpSpPr>
+      <p:sp>
+        <p:nvSpPr>
+          <p:cNvPr id="2" name="Slide Image Placeholder 1"/>
+          <p:cNvSpPr>
+            <a:spLocks noGrp="1" noRot="1" noChangeAspect="1"/>
+          </p:cNvSpPr>
+          <p:nvPr>
+            <p:ph type="sldImg"/>
+          </p:nvPr>
+        </p:nvSpPr>
+        <p:spPr/>
+      </p:sp>
+      <p:sp>
+        <p:nvSpPr>
+          <p:cNvPr id="3" name="Notes Placeholder 2"/>
+          <p:cNvSpPr>
+            <a:spLocks noGrp="1"/>
+          </p:cNvSpPr>
+          <p:nvPr>
+            <p:ph type="body" idx="1"/>
+          </p:nvPr>
+        </p:nvSpPr>
+        <p:spPr/>
+        <p:txBody>
+          <a:bodyPr/>
+          <a:lstStyle/>
+          <a:p>
+            <a:r>
+              <a:rPr lang="en-US" dirty="0"/>
+              <a:t>The strongest form of the reuse claim: not that the code is tidy, but that the result was tested for what it depends on. Removing the DSP extension was expected to destroy the inversion and did not, which is how we learned it is structural to depthwise convolution rather than a gap in the kernel library.</a:t>
+            </a:r>
+            <a:endParaRPr lang="en-US" dirty="0"/>
+          </a:p>
+        </p:txBody>
+      </p:sp>
+      <p:sp>
+        <p:nvSpPr>
+          <p:cNvPr id="4" name="Slide Number Placeholder 3"/>
+          <p:cNvSpPr>
+            <a:spLocks noGrp="1"/>
+          </p:cNvSpPr>
+          <p:nvPr>
+            <p:ph type="sldNum" sz="quarter" idx="10"/>
+          </p:nvPr>
+        </p:nvSpPr>
+        <p:spPr/>
+        <p:txBody>
+          <a:bodyPr/>
+          <a:lstStyle/>
+          <a:p>
+            <a:fld id="{F7021451-1387-4CA6-816F-3879F97B5CBC}" type="slidenum">
+              <a:rPr lang="en-US"/>
+              <a:t>12</a:t>
             </a:fld>
             <a:endParaRPr lang="en-US"/>
           </a:p>
@@ -1872,7 +1961,7 @@
               <a:buNone/>
             </a:pPr>
             <a:r>
-              <a:rPr lang="en-US" sz="5200" b="1" dirty="0">
+              <a:rPr lang="en-US" sz="4600" b="1" dirty="0">
                 <a:solidFill>
                   <a:srgbClr val="FFFFFF"/>
                 </a:solidFill>
@@ -1880,9 +1969,9 @@
                 <a:ea typeface="Cambria" pitchFamily="34" charset="-122"/>
                 <a:cs typeface="Cambria" pitchFamily="34" charset="-120"/>
               </a:rPr>
-              <a:t>RTOS-Coupled</a:t>
-            </a:r>
-            <a:endParaRPr lang="en-US" sz="5200" dirty="0"/>
+              <a:t>µT-Kernel RTOS-Coupled</a:t>
+            </a:r>
+            <a:endParaRPr lang="en-US" sz="4600" dirty="0"/>
           </a:p>
           <a:p>
             <a:pPr indent="0" marL="0">
@@ -1892,7 +1981,7 @@
               <a:buNone/>
             </a:pPr>
             <a:r>
-              <a:rPr lang="en-US" sz="5200" b="1" dirty="0">
+              <a:rPr lang="en-US" sz="4600" b="1" dirty="0">
                 <a:solidFill>
                   <a:srgbClr val="FFFFFF"/>
                 </a:solidFill>
@@ -1902,7 +1991,7 @@
               </a:rPr>
               <a:t>Adaptive Edge AI</a:t>
             </a:r>
-            <a:endParaRPr lang="en-US" sz="5200" dirty="0"/>
+            <a:endParaRPr lang="en-US" sz="4600" dirty="0"/>
           </a:p>
         </p:txBody>
       </p:sp>
@@ -2986,6 +3075,1247 @@
     <p:bg>
       <p:bgPr>
         <a:solidFill>
+          <a:srgbClr val="FFFFFF"/>
+        </a:solidFill>
+      </p:bgPr>
+    </p:bg>
+    <p:spTree>
+      <p:nvGrpSpPr>
+        <p:cNvPr id="1" name=""/>
+        <p:cNvGrpSpPr/>
+        <p:nvPr/>
+      </p:nvGrpSpPr>
+      <p:grpSpPr>
+        <a:xfrm>
+          <a:off x="0" y="0"/>
+          <a:ext cx="0" cy="0"/>
+          <a:chOff x="0" y="0"/>
+          <a:chExt cx="0" cy="0"/>
+        </a:xfrm>
+      </p:grpSpPr>
+      <p:sp>
+        <p:nvSpPr>
+          <p:cNvPr id="2" name="Text 0"/>
+          <p:cNvSpPr txBox="1"/>
+          <p:nvPr/>
+        </p:nvSpPr>
+        <p:spPr>
+          <a:xfrm>
+            <a:off x="640080" y="384048"/>
+            <a:ext cx="10881360" cy="274320"/>
+          </a:xfrm>
+          <a:prstGeom prst="rect">
+            <a:avLst/>
+          </a:prstGeom>
+          <a:noFill/>
+          <a:ln/>
+        </p:spPr>
+        <p:txBody>
+          <a:bodyPr wrap="square" lIns="0" tIns="0" rIns="0" bIns="0" rtlCol="0" anchor="t"/>
+          <a:lstStyle/>
+          <a:p>
+            <a:pPr indent="0" marL="0">
+              <a:buNone/>
+            </a:pPr>
+            <a:r>
+              <a:rPr lang="en-US" sz="1200" b="1" spc="140" kern="0" dirty="0">
+                <a:solidFill>
+                  <a:srgbClr val="F6AE2D"/>
+                </a:solidFill>
+                <a:latin typeface="Calibri" pitchFamily="34" charset="0"/>
+                <a:ea typeface="Calibri" pitchFamily="34" charset="-122"/>
+                <a:cs typeface="Calibri" pitchFamily="34" charset="-120"/>
+              </a:rPr>
+              <a:t>SELECTED REFERENCES</a:t>
+            </a:r>
+            <a:endParaRPr lang="en-US" sz="1200" dirty="0"/>
+          </a:p>
+        </p:txBody>
+      </p:sp>
+      <p:sp>
+        <p:nvSpPr>
+          <p:cNvPr id="3" name="Text 1"/>
+          <p:cNvSpPr txBox="1"/>
+          <p:nvPr/>
+        </p:nvSpPr>
+        <p:spPr>
+          <a:xfrm>
+            <a:off x="640080" y="658368"/>
+            <a:ext cx="10881360" cy="713232"/>
+          </a:xfrm>
+          <a:prstGeom prst="rect">
+            <a:avLst/>
+          </a:prstGeom>
+          <a:noFill/>
+          <a:ln/>
+        </p:spPr>
+        <p:txBody>
+          <a:bodyPr wrap="square" lIns="0" tIns="0" rIns="0" bIns="0" rtlCol="0" anchor="t"/>
+          <a:lstStyle/>
+          <a:p>
+            <a:pPr indent="0" marL="0">
+              <a:buNone/>
+            </a:pPr>
+            <a:r>
+              <a:rPr lang="en-US" sz="3400" b="1" dirty="0">
+                <a:solidFill>
+                  <a:srgbClr val="12193A"/>
+                </a:solidFill>
+                <a:latin typeface="Cambria" pitchFamily="34" charset="0"/>
+                <a:ea typeface="Cambria" pitchFamily="34" charset="-122"/>
+                <a:cs typeface="Cambria" pitchFamily="34" charset="-120"/>
+              </a:rPr>
+              <a:t>Built on four lines of research</a:t>
+            </a:r>
+            <a:endParaRPr lang="en-US" sz="3400" dirty="0"/>
+          </a:p>
+        </p:txBody>
+      </p:sp>
+      <p:sp>
+        <p:nvSpPr>
+          <p:cNvPr id="4" name="Shape 2"/>
+          <p:cNvSpPr/>
+          <p:nvPr/>
+        </p:nvSpPr>
+        <p:spPr>
+          <a:xfrm>
+            <a:off x="640080" y="1600200"/>
+            <a:ext cx="5303520" cy="1965960"/>
+          </a:xfrm>
+          <a:prstGeom prst="roundRect">
+            <a:avLst>
+              <a:gd name="adj" fmla="val 4651"/>
+            </a:avLst>
+          </a:prstGeom>
+          <a:solidFill>
+            <a:srgbClr val="1E2761"/>
+          </a:solidFill>
+          <a:ln/>
+        </p:spPr>
+      </p:sp>
+      <p:sp>
+        <p:nvSpPr>
+          <p:cNvPr id="5" name="Text 3"/>
+          <p:cNvSpPr txBox="1"/>
+          <p:nvPr/>
+        </p:nvSpPr>
+        <p:spPr>
+          <a:xfrm>
+            <a:off x="914400" y="1801368"/>
+            <a:ext cx="4754880" cy="329184"/>
+          </a:xfrm>
+          <a:prstGeom prst="rect">
+            <a:avLst/>
+          </a:prstGeom>
+          <a:noFill/>
+          <a:ln/>
+        </p:spPr>
+        <p:txBody>
+          <a:bodyPr wrap="square" lIns="0" tIns="0" rIns="0" bIns="0" rtlCol="0" anchor="t"/>
+          <a:lstStyle/>
+          <a:p>
+            <a:pPr indent="0" marL="0">
+              <a:buNone/>
+            </a:pPr>
+            <a:r>
+              <a:rPr lang="en-US" sz="1400" b="1" dirty="0">
+                <a:solidFill>
+                  <a:srgbClr val="F6AE2D"/>
+                </a:solidFill>
+                <a:latin typeface="Calibri" pitchFamily="34" charset="0"/>
+                <a:ea typeface="Calibri" pitchFamily="34" charset="-122"/>
+                <a:cs typeface="Calibri" pitchFamily="34" charset="-120"/>
+              </a:rPr>
+              <a:t>Real time foundations</a:t>
+            </a:r>
+            <a:endParaRPr lang="en-US" sz="1400" dirty="0"/>
+          </a:p>
+        </p:txBody>
+      </p:sp>
+      <p:sp>
+        <p:nvSpPr>
+          <p:cNvPr id="6" name="Text 4"/>
+          <p:cNvSpPr txBox="1"/>
+          <p:nvPr/>
+        </p:nvSpPr>
+        <p:spPr>
+          <a:xfrm>
+            <a:off x="914400" y="2221992"/>
+            <a:ext cx="4754880" cy="292608"/>
+          </a:xfrm>
+          <a:prstGeom prst="rect">
+            <a:avLst/>
+          </a:prstGeom>
+          <a:noFill/>
+          <a:ln/>
+        </p:spPr>
+        <p:txBody>
+          <a:bodyPr wrap="square" lIns="0" tIns="0" rIns="0" bIns="0" rtlCol="0" anchor="t"/>
+          <a:lstStyle/>
+          <a:p>
+            <a:pPr indent="0" marL="0">
+              <a:buNone/>
+            </a:pPr>
+            <a:r>
+              <a:rPr lang="en-US" sz="1150" b="1" dirty="0">
+                <a:solidFill>
+                  <a:srgbClr val="FFFFFF"/>
+                </a:solidFill>
+                <a:latin typeface="Calibri" pitchFamily="34" charset="0"/>
+                <a:ea typeface="Calibri" pitchFamily="34" charset="-122"/>
+                <a:cs typeface="Calibri" pitchFamily="34" charset="-120"/>
+              </a:rPr>
+              <a:t>Sakamura, IEEE Micro 1987</a:t>
+            </a:r>
+            <a:pPr indent="0" marL="0">
+              <a:buNone/>
+            </a:pPr>
+            <a:r>
+              <a:rPr lang="en-US" sz="1150" dirty="0">
+                <a:solidFill>
+                  <a:srgbClr val="CADCFC"/>
+                </a:solidFill>
+                <a:latin typeface="Calibri" pitchFamily="34" charset="0"/>
+                <a:ea typeface="Calibri" pitchFamily="34" charset="-122"/>
+                <a:cs typeface="Calibri" pitchFamily="34" charset="-120"/>
+              </a:rPr>
+              <a:t>   ·   the TRON project</a:t>
+            </a:r>
+            <a:endParaRPr lang="en-US" sz="1150" dirty="0"/>
+          </a:p>
+        </p:txBody>
+      </p:sp>
+      <p:sp>
+        <p:nvSpPr>
+          <p:cNvPr id="7" name="Text 5"/>
+          <p:cNvSpPr txBox="1"/>
+          <p:nvPr/>
+        </p:nvSpPr>
+        <p:spPr>
+          <a:xfrm>
+            <a:off x="914400" y="2542032"/>
+            <a:ext cx="4754880" cy="292608"/>
+          </a:xfrm>
+          <a:prstGeom prst="rect">
+            <a:avLst/>
+          </a:prstGeom>
+          <a:noFill/>
+          <a:ln/>
+        </p:spPr>
+        <p:txBody>
+          <a:bodyPr wrap="square" lIns="0" tIns="0" rIns="0" bIns="0" rtlCol="0" anchor="t"/>
+          <a:lstStyle/>
+          <a:p>
+            <a:pPr indent="0" marL="0">
+              <a:buNone/>
+            </a:pPr>
+            <a:r>
+              <a:rPr lang="en-US" sz="1150" b="1" dirty="0">
+                <a:solidFill>
+                  <a:srgbClr val="FFFFFF"/>
+                </a:solidFill>
+                <a:latin typeface="Calibri" pitchFamily="34" charset="0"/>
+                <a:ea typeface="Calibri" pitchFamily="34" charset="-122"/>
+                <a:cs typeface="Calibri" pitchFamily="34" charset="-120"/>
+              </a:rPr>
+              <a:t>Liu and Layland, JACM 1973</a:t>
+            </a:r>
+            <a:pPr indent="0" marL="0">
+              <a:buNone/>
+            </a:pPr>
+            <a:r>
+              <a:rPr lang="en-US" sz="1150" dirty="0">
+                <a:solidFill>
+                  <a:srgbClr val="CADCFC"/>
+                </a:solidFill>
+                <a:latin typeface="Calibri" pitchFamily="34" charset="0"/>
+                <a:ea typeface="Calibri" pitchFamily="34" charset="-122"/>
+                <a:cs typeface="Calibri" pitchFamily="34" charset="-120"/>
+              </a:rPr>
+              <a:t>   ·   scheduling to periodic deadlines</a:t>
+            </a:r>
+            <a:endParaRPr lang="en-US" sz="1150" dirty="0"/>
+          </a:p>
+        </p:txBody>
+      </p:sp>
+      <p:sp>
+        <p:nvSpPr>
+          <p:cNvPr id="8" name="Text 6"/>
+          <p:cNvSpPr txBox="1"/>
+          <p:nvPr/>
+        </p:nvSpPr>
+        <p:spPr>
+          <a:xfrm>
+            <a:off x="914400" y="2862072"/>
+            <a:ext cx="4754880" cy="292608"/>
+          </a:xfrm>
+          <a:prstGeom prst="rect">
+            <a:avLst/>
+          </a:prstGeom>
+          <a:noFill/>
+          <a:ln/>
+        </p:spPr>
+        <p:txBody>
+          <a:bodyPr wrap="square" lIns="0" tIns="0" rIns="0" bIns="0" rtlCol="0" anchor="t"/>
+          <a:lstStyle/>
+          <a:p>
+            <a:pPr indent="0" marL="0">
+              <a:buNone/>
+            </a:pPr>
+            <a:r>
+              <a:rPr lang="en-US" sz="1150" b="1" dirty="0">
+                <a:solidFill>
+                  <a:srgbClr val="FFFFFF"/>
+                </a:solidFill>
+                <a:latin typeface="Calibri" pitchFamily="34" charset="0"/>
+                <a:ea typeface="Calibri" pitchFamily="34" charset="-122"/>
+                <a:cs typeface="Calibri" pitchFamily="34" charset="-120"/>
+              </a:rPr>
+              <a:t>Liu et al., Proc. IEEE 1994</a:t>
+            </a:r>
+            <a:pPr indent="0" marL="0">
+              <a:buNone/>
+            </a:pPr>
+            <a:r>
+              <a:rPr lang="en-US" sz="1150" dirty="0">
+                <a:solidFill>
+                  <a:srgbClr val="CADCFC"/>
+                </a:solidFill>
+                <a:latin typeface="Calibri" pitchFamily="34" charset="0"/>
+                <a:ea typeface="Calibri" pitchFamily="34" charset="-122"/>
+                <a:cs typeface="Calibri" pitchFamily="34" charset="-120"/>
+              </a:rPr>
+              <a:t>   ·   imprecise computation</a:t>
+            </a:r>
+            <a:endParaRPr lang="en-US" sz="1150" dirty="0"/>
+          </a:p>
+        </p:txBody>
+      </p:sp>
+      <p:sp>
+        <p:nvSpPr>
+          <p:cNvPr id="9" name="Text 7"/>
+          <p:cNvSpPr txBox="1"/>
+          <p:nvPr/>
+        </p:nvSpPr>
+        <p:spPr>
+          <a:xfrm>
+            <a:off x="914400" y="3182112"/>
+            <a:ext cx="4754880" cy="292608"/>
+          </a:xfrm>
+          <a:prstGeom prst="rect">
+            <a:avLst/>
+          </a:prstGeom>
+          <a:noFill/>
+          <a:ln/>
+        </p:spPr>
+        <p:txBody>
+          <a:bodyPr wrap="square" lIns="0" tIns="0" rIns="0" bIns="0" rtlCol="0" anchor="t"/>
+          <a:lstStyle/>
+          <a:p>
+            <a:pPr indent="0" marL="0">
+              <a:buNone/>
+            </a:pPr>
+            <a:r>
+              <a:rPr lang="en-US" sz="1150" b="1" dirty="0">
+                <a:solidFill>
+                  <a:srgbClr val="FFFFFF"/>
+                </a:solidFill>
+                <a:latin typeface="Calibri" pitchFamily="34" charset="0"/>
+                <a:ea typeface="Calibri" pitchFamily="34" charset="-122"/>
+                <a:cs typeface="Calibri" pitchFamily="34" charset="-120"/>
+              </a:rPr>
+              <a:t>Lu et al., Real-Time Systems 2002</a:t>
+            </a:r>
+            <a:pPr indent="0" marL="0">
+              <a:buNone/>
+            </a:pPr>
+            <a:r>
+              <a:rPr lang="en-US" sz="1150" dirty="0">
+                <a:solidFill>
+                  <a:srgbClr val="CADCFC"/>
+                </a:solidFill>
+                <a:latin typeface="Calibri" pitchFamily="34" charset="0"/>
+                <a:ea typeface="Calibri" pitchFamily="34" charset="-122"/>
+                <a:cs typeface="Calibri" pitchFamily="34" charset="-120"/>
+              </a:rPr>
+              <a:t>   ·   feedback control scheduling</a:t>
+            </a:r>
+            <a:endParaRPr lang="en-US" sz="1150" dirty="0"/>
+          </a:p>
+        </p:txBody>
+      </p:sp>
+      <p:sp>
+        <p:nvSpPr>
+          <p:cNvPr id="10" name="Shape 8"/>
+          <p:cNvSpPr/>
+          <p:nvPr/>
+        </p:nvSpPr>
+        <p:spPr>
+          <a:xfrm>
+            <a:off x="6217920" y="1600200"/>
+            <a:ext cx="5303520" cy="1965960"/>
+          </a:xfrm>
+          <a:prstGeom prst="roundRect">
+            <a:avLst>
+              <a:gd name="adj" fmla="val 4651"/>
+            </a:avLst>
+          </a:prstGeom>
+          <a:solidFill>
+            <a:srgbClr val="F4F7FC"/>
+          </a:solidFill>
+          <a:ln/>
+        </p:spPr>
+      </p:sp>
+      <p:sp>
+        <p:nvSpPr>
+          <p:cNvPr id="11" name="Text 9"/>
+          <p:cNvSpPr txBox="1"/>
+          <p:nvPr/>
+        </p:nvSpPr>
+        <p:spPr>
+          <a:xfrm>
+            <a:off x="6492240" y="1801368"/>
+            <a:ext cx="4754880" cy="329184"/>
+          </a:xfrm>
+          <a:prstGeom prst="rect">
+            <a:avLst/>
+          </a:prstGeom>
+          <a:noFill/>
+          <a:ln/>
+        </p:spPr>
+        <p:txBody>
+          <a:bodyPr wrap="square" lIns="0" tIns="0" rIns="0" bIns="0" rtlCol="0" anchor="t"/>
+          <a:lstStyle/>
+          <a:p>
+            <a:pPr indent="0" marL="0">
+              <a:buNone/>
+            </a:pPr>
+            <a:r>
+              <a:rPr lang="en-US" sz="1400" b="1" dirty="0">
+                <a:solidFill>
+                  <a:srgbClr val="12193A"/>
+                </a:solidFill>
+                <a:latin typeface="Calibri" pitchFamily="34" charset="0"/>
+                <a:ea typeface="Calibri" pitchFamily="34" charset="-122"/>
+                <a:cs typeface="Calibri" pitchFamily="34" charset="-120"/>
+              </a:rPr>
+              <a:t>Adaptive inference under deadlines</a:t>
+            </a:r>
+            <a:endParaRPr lang="en-US" sz="1400" dirty="0"/>
+          </a:p>
+        </p:txBody>
+      </p:sp>
+      <p:sp>
+        <p:nvSpPr>
+          <p:cNvPr id="12" name="Text 10"/>
+          <p:cNvSpPr txBox="1"/>
+          <p:nvPr/>
+        </p:nvSpPr>
+        <p:spPr>
+          <a:xfrm>
+            <a:off x="6492240" y="2221992"/>
+            <a:ext cx="4754880" cy="292608"/>
+          </a:xfrm>
+          <a:prstGeom prst="rect">
+            <a:avLst/>
+          </a:prstGeom>
+          <a:noFill/>
+          <a:ln/>
+        </p:spPr>
+        <p:txBody>
+          <a:bodyPr wrap="square" lIns="0" tIns="0" rIns="0" bIns="0" rtlCol="0" anchor="t"/>
+          <a:lstStyle/>
+          <a:p>
+            <a:pPr indent="0" marL="0">
+              <a:buNone/>
+            </a:pPr>
+            <a:r>
+              <a:rPr lang="en-US" sz="1150" b="1" dirty="0">
+                <a:solidFill>
+                  <a:srgbClr val="1E2761"/>
+                </a:solidFill>
+                <a:latin typeface="Calibri" pitchFamily="34" charset="0"/>
+                <a:ea typeface="Calibri" pitchFamily="34" charset="-122"/>
+                <a:cs typeface="Calibri" pitchFamily="34" charset="-120"/>
+              </a:rPr>
+              <a:t>Bateni and Liu, RTSS 2018</a:t>
+            </a:r>
+            <a:pPr indent="0" marL="0">
+              <a:buNone/>
+            </a:pPr>
+            <a:r>
+              <a:rPr lang="en-US" sz="1150" dirty="0">
+                <a:solidFill>
+                  <a:srgbClr val="5A6B8C"/>
+                </a:solidFill>
+                <a:latin typeface="Calibri" pitchFamily="34" charset="0"/>
+                <a:ea typeface="Calibri" pitchFamily="34" charset="-122"/>
+                <a:cs typeface="Calibri" pitchFamily="34" charset="-120"/>
+              </a:rPr>
+              <a:t>   ·   ApNet, layer wise approximation</a:t>
+            </a:r>
+            <a:endParaRPr lang="en-US" sz="1150" dirty="0"/>
+          </a:p>
+        </p:txBody>
+      </p:sp>
+      <p:sp>
+        <p:nvSpPr>
+          <p:cNvPr id="13" name="Text 11"/>
+          <p:cNvSpPr txBox="1"/>
+          <p:nvPr/>
+        </p:nvSpPr>
+        <p:spPr>
+          <a:xfrm>
+            <a:off x="6492240" y="2542032"/>
+            <a:ext cx="4754880" cy="292608"/>
+          </a:xfrm>
+          <a:prstGeom prst="rect">
+            <a:avLst/>
+          </a:prstGeom>
+          <a:noFill/>
+          <a:ln/>
+        </p:spPr>
+        <p:txBody>
+          <a:bodyPr wrap="square" lIns="0" tIns="0" rIns="0" bIns="0" rtlCol="0" anchor="t"/>
+          <a:lstStyle/>
+          <a:p>
+            <a:pPr indent="0" marL="0">
+              <a:buNone/>
+            </a:pPr>
+            <a:r>
+              <a:rPr lang="en-US" sz="1150" b="1" dirty="0">
+                <a:solidFill>
+                  <a:srgbClr val="1E2761"/>
+                </a:solidFill>
+                <a:latin typeface="Calibri" pitchFamily="34" charset="0"/>
+                <a:ea typeface="Calibri" pitchFamily="34" charset="-122"/>
+                <a:cs typeface="Calibri" pitchFamily="34" charset="-120"/>
+              </a:rPr>
+              <a:t>Kang et al., RTSS 2021</a:t>
+            </a:r>
+            <a:pPr indent="0" marL="0">
+              <a:buNone/>
+            </a:pPr>
+            <a:r>
+              <a:rPr lang="en-US" sz="1150" dirty="0">
+                <a:solidFill>
+                  <a:srgbClr val="5A6B8C"/>
+                </a:solidFill>
+                <a:latin typeface="Calibri" pitchFamily="34" charset="0"/>
+                <a:ea typeface="Calibri" pitchFamily="34" charset="-122"/>
+                <a:cs typeface="Calibri" pitchFamily="34" charset="-120"/>
+              </a:rPr>
+              <a:t>   ·   LaLaRAND, layer level scheduling</a:t>
+            </a:r>
+            <a:endParaRPr lang="en-US" sz="1150" dirty="0"/>
+          </a:p>
+        </p:txBody>
+      </p:sp>
+      <p:sp>
+        <p:nvSpPr>
+          <p:cNvPr id="14" name="Text 12"/>
+          <p:cNvSpPr txBox="1"/>
+          <p:nvPr/>
+        </p:nvSpPr>
+        <p:spPr>
+          <a:xfrm>
+            <a:off x="6492240" y="2862072"/>
+            <a:ext cx="4754880" cy="292608"/>
+          </a:xfrm>
+          <a:prstGeom prst="rect">
+            <a:avLst/>
+          </a:prstGeom>
+          <a:noFill/>
+          <a:ln/>
+        </p:spPr>
+        <p:txBody>
+          <a:bodyPr wrap="square" lIns="0" tIns="0" rIns="0" bIns="0" rtlCol="0" anchor="t"/>
+          <a:lstStyle/>
+          <a:p>
+            <a:pPr indent="0" marL="0">
+              <a:buNone/>
+            </a:pPr>
+            <a:r>
+              <a:rPr lang="en-US" sz="1150" b="1" dirty="0">
+                <a:solidFill>
+                  <a:srgbClr val="1E2761"/>
+                </a:solidFill>
+                <a:latin typeface="Calibri" pitchFamily="34" charset="0"/>
+                <a:ea typeface="Calibri" pitchFamily="34" charset="-122"/>
+                <a:cs typeface="Calibri" pitchFamily="34" charset="-120"/>
+              </a:rPr>
+              <a:t>Islam and Nirjon, IMWUT 2020</a:t>
+            </a:r>
+            <a:pPr indent="0" marL="0">
+              <a:buNone/>
+            </a:pPr>
+            <a:r>
+              <a:rPr lang="en-US" sz="1150" dirty="0">
+                <a:solidFill>
+                  <a:srgbClr val="5A6B8C"/>
+                </a:solidFill>
+                <a:latin typeface="Calibri" pitchFamily="34" charset="0"/>
+                <a:ea typeface="Calibri" pitchFamily="34" charset="-122"/>
+                <a:cs typeface="Calibri" pitchFamily="34" charset="-120"/>
+              </a:rPr>
+              <a:t>   ·   Zygarde, batteryless inference</a:t>
+            </a:r>
+            <a:endParaRPr lang="en-US" sz="1150" dirty="0"/>
+          </a:p>
+        </p:txBody>
+      </p:sp>
+      <p:sp>
+        <p:nvSpPr>
+          <p:cNvPr id="15" name="Text 13"/>
+          <p:cNvSpPr txBox="1"/>
+          <p:nvPr/>
+        </p:nvSpPr>
+        <p:spPr>
+          <a:xfrm>
+            <a:off x="6492240" y="3182112"/>
+            <a:ext cx="4754880" cy="292608"/>
+          </a:xfrm>
+          <a:prstGeom prst="rect">
+            <a:avLst/>
+          </a:prstGeom>
+          <a:noFill/>
+          <a:ln/>
+        </p:spPr>
+        <p:txBody>
+          <a:bodyPr wrap="square" lIns="0" tIns="0" rIns="0" bIns="0" rtlCol="0" anchor="t"/>
+          <a:lstStyle/>
+          <a:p>
+            <a:pPr indent="0" marL="0">
+              <a:buNone/>
+            </a:pPr>
+            <a:r>
+              <a:rPr lang="en-US" sz="1150" b="1" dirty="0">
+                <a:solidFill>
+                  <a:srgbClr val="1E2761"/>
+                </a:solidFill>
+                <a:latin typeface="Calibri" pitchFamily="34" charset="0"/>
+                <a:ea typeface="Calibri" pitchFamily="34" charset="-122"/>
+                <a:cs typeface="Calibri" pitchFamily="34" charset="-120"/>
+              </a:rPr>
+              <a:t>Han et al., TPAMI 2022</a:t>
+            </a:r>
+            <a:pPr indent="0" marL="0">
+              <a:buNone/>
+            </a:pPr>
+            <a:r>
+              <a:rPr lang="en-US" sz="1150" dirty="0">
+                <a:solidFill>
+                  <a:srgbClr val="5A6B8C"/>
+                </a:solidFill>
+                <a:latin typeface="Calibri" pitchFamily="34" charset="0"/>
+                <a:ea typeface="Calibri" pitchFamily="34" charset="-122"/>
+                <a:cs typeface="Calibri" pitchFamily="34" charset="-120"/>
+              </a:rPr>
+              <a:t>   ·   dynamic neural networks</a:t>
+            </a:r>
+            <a:endParaRPr lang="en-US" sz="1150" dirty="0"/>
+          </a:p>
+        </p:txBody>
+      </p:sp>
+      <p:sp>
+        <p:nvSpPr>
+          <p:cNvPr id="16" name="Shape 14"/>
+          <p:cNvSpPr/>
+          <p:nvPr/>
+        </p:nvSpPr>
+        <p:spPr>
+          <a:xfrm>
+            <a:off x="640080" y="3767328"/>
+            <a:ext cx="5303520" cy="1965960"/>
+          </a:xfrm>
+          <a:prstGeom prst="roundRect">
+            <a:avLst>
+              <a:gd name="adj" fmla="val 4651"/>
+            </a:avLst>
+          </a:prstGeom>
+          <a:solidFill>
+            <a:srgbClr val="F4F7FC"/>
+          </a:solidFill>
+          <a:ln/>
+        </p:spPr>
+      </p:sp>
+      <p:sp>
+        <p:nvSpPr>
+          <p:cNvPr id="17" name="Text 15"/>
+          <p:cNvSpPr txBox="1"/>
+          <p:nvPr/>
+        </p:nvSpPr>
+        <p:spPr>
+          <a:xfrm>
+            <a:off x="914400" y="3968496"/>
+            <a:ext cx="4754880" cy="329184"/>
+          </a:xfrm>
+          <a:prstGeom prst="rect">
+            <a:avLst/>
+          </a:prstGeom>
+          <a:noFill/>
+          <a:ln/>
+        </p:spPr>
+        <p:txBody>
+          <a:bodyPr wrap="square" lIns="0" tIns="0" rIns="0" bIns="0" rtlCol="0" anchor="t"/>
+          <a:lstStyle/>
+          <a:p>
+            <a:pPr indent="0" marL="0">
+              <a:buNone/>
+            </a:pPr>
+            <a:r>
+              <a:rPr lang="en-US" sz="1400" b="1" dirty="0">
+                <a:solidFill>
+                  <a:srgbClr val="12193A"/>
+                </a:solidFill>
+                <a:latin typeface="Calibri" pitchFamily="34" charset="0"/>
+                <a:ea typeface="Calibri" pitchFamily="34" charset="-122"/>
+                <a:cs typeface="Calibri" pitchFamily="34" charset="-120"/>
+              </a:rPr>
+              <a:t>Quantisation and precision</a:t>
+            </a:r>
+            <a:endParaRPr lang="en-US" sz="1400" dirty="0"/>
+          </a:p>
+        </p:txBody>
+      </p:sp>
+      <p:sp>
+        <p:nvSpPr>
+          <p:cNvPr id="18" name="Text 16"/>
+          <p:cNvSpPr txBox="1"/>
+          <p:nvPr/>
+        </p:nvSpPr>
+        <p:spPr>
+          <a:xfrm>
+            <a:off x="914400" y="4389120"/>
+            <a:ext cx="4754880" cy="292608"/>
+          </a:xfrm>
+          <a:prstGeom prst="rect">
+            <a:avLst/>
+          </a:prstGeom>
+          <a:noFill/>
+          <a:ln/>
+        </p:spPr>
+        <p:txBody>
+          <a:bodyPr wrap="square" lIns="0" tIns="0" rIns="0" bIns="0" rtlCol="0" anchor="t"/>
+          <a:lstStyle/>
+          <a:p>
+            <a:pPr indent="0" marL="0">
+              <a:buNone/>
+            </a:pPr>
+            <a:r>
+              <a:rPr lang="en-US" sz="1150" b="1" dirty="0">
+                <a:solidFill>
+                  <a:srgbClr val="1E2761"/>
+                </a:solidFill>
+                <a:latin typeface="Calibri" pitchFamily="34" charset="0"/>
+                <a:ea typeface="Calibri" pitchFamily="34" charset="-122"/>
+                <a:cs typeface="Calibri" pitchFamily="34" charset="-120"/>
+              </a:rPr>
+              <a:t>Jacob et al., CVPR 2018</a:t>
+            </a:r>
+            <a:pPr indent="0" marL="0">
+              <a:buNone/>
+            </a:pPr>
+            <a:r>
+              <a:rPr lang="en-US" sz="1150" dirty="0">
+                <a:solidFill>
+                  <a:srgbClr val="5A6B8C"/>
+                </a:solidFill>
+                <a:latin typeface="Calibri" pitchFamily="34" charset="0"/>
+                <a:ea typeface="Calibri" pitchFamily="34" charset="-122"/>
+                <a:cs typeface="Calibri" pitchFamily="34" charset="-120"/>
+              </a:rPr>
+              <a:t>   ·   integer only inference</a:t>
+            </a:r>
+            <a:endParaRPr lang="en-US" sz="1150" dirty="0"/>
+          </a:p>
+        </p:txBody>
+      </p:sp>
+      <p:sp>
+        <p:nvSpPr>
+          <p:cNvPr id="19" name="Text 17"/>
+          <p:cNvSpPr txBox="1"/>
+          <p:nvPr/>
+        </p:nvSpPr>
+        <p:spPr>
+          <a:xfrm>
+            <a:off x="914400" y="4709160"/>
+            <a:ext cx="4754880" cy="292608"/>
+          </a:xfrm>
+          <a:prstGeom prst="rect">
+            <a:avLst/>
+          </a:prstGeom>
+          <a:noFill/>
+          <a:ln/>
+        </p:spPr>
+        <p:txBody>
+          <a:bodyPr wrap="square" lIns="0" tIns="0" rIns="0" bIns="0" rtlCol="0" anchor="t"/>
+          <a:lstStyle/>
+          <a:p>
+            <a:pPr indent="0" marL="0">
+              <a:buNone/>
+            </a:pPr>
+            <a:r>
+              <a:rPr lang="en-US" sz="1150" b="1" dirty="0">
+                <a:solidFill>
+                  <a:srgbClr val="1E2761"/>
+                </a:solidFill>
+                <a:latin typeface="Calibri" pitchFamily="34" charset="0"/>
+                <a:ea typeface="Calibri" pitchFamily="34" charset="-122"/>
+                <a:cs typeface="Calibri" pitchFamily="34" charset="-120"/>
+              </a:rPr>
+              <a:t>Wang et al., CVPR 2019</a:t>
+            </a:r>
+            <a:pPr indent="0" marL="0">
+              <a:buNone/>
+            </a:pPr>
+            <a:r>
+              <a:rPr lang="en-US" sz="1150" dirty="0">
+                <a:solidFill>
+                  <a:srgbClr val="5A6B8C"/>
+                </a:solidFill>
+                <a:latin typeface="Calibri" pitchFamily="34" charset="0"/>
+                <a:ea typeface="Calibri" pitchFamily="34" charset="-122"/>
+                <a:cs typeface="Calibri" pitchFamily="34" charset="-120"/>
+              </a:rPr>
+              <a:t>   ·   HAQ, hardware aware precision</a:t>
+            </a:r>
+            <a:endParaRPr lang="en-US" sz="1150" dirty="0"/>
+          </a:p>
+        </p:txBody>
+      </p:sp>
+      <p:sp>
+        <p:nvSpPr>
+          <p:cNvPr id="20" name="Text 18"/>
+          <p:cNvSpPr txBox="1"/>
+          <p:nvPr/>
+        </p:nvSpPr>
+        <p:spPr>
+          <a:xfrm>
+            <a:off x="914400" y="5029200"/>
+            <a:ext cx="4754880" cy="292608"/>
+          </a:xfrm>
+          <a:prstGeom prst="rect">
+            <a:avLst/>
+          </a:prstGeom>
+          <a:noFill/>
+          <a:ln/>
+        </p:spPr>
+        <p:txBody>
+          <a:bodyPr wrap="square" lIns="0" tIns="0" rIns="0" bIns="0" rtlCol="0" anchor="t"/>
+          <a:lstStyle/>
+          <a:p>
+            <a:pPr indent="0" marL="0">
+              <a:buNone/>
+            </a:pPr>
+            <a:r>
+              <a:rPr lang="en-US" sz="1150" b="1" dirty="0">
+                <a:solidFill>
+                  <a:srgbClr val="1E2761"/>
+                </a:solidFill>
+                <a:latin typeface="Calibri" pitchFamily="34" charset="0"/>
+                <a:ea typeface="Calibri" pitchFamily="34" charset="-122"/>
+                <a:cs typeface="Calibri" pitchFamily="34" charset="-120"/>
+              </a:rPr>
+              <a:t>Rusci et al., MLSys 2020</a:t>
+            </a:r>
+            <a:pPr indent="0" marL="0">
+              <a:buNone/>
+            </a:pPr>
+            <a:r>
+              <a:rPr lang="en-US" sz="1150" dirty="0">
+                <a:solidFill>
+                  <a:srgbClr val="5A6B8C"/>
+                </a:solidFill>
+                <a:latin typeface="Calibri" pitchFamily="34" charset="0"/>
+                <a:ea typeface="Calibri" pitchFamily="34" charset="-122"/>
+                <a:cs typeface="Calibri" pitchFamily="34" charset="-120"/>
+              </a:rPr>
+              <a:t>   ·   mixed precision on microcontrollers</a:t>
+            </a:r>
+            <a:endParaRPr lang="en-US" sz="1150" dirty="0"/>
+          </a:p>
+        </p:txBody>
+      </p:sp>
+      <p:sp>
+        <p:nvSpPr>
+          <p:cNvPr id="21" name="Text 19"/>
+          <p:cNvSpPr txBox="1"/>
+          <p:nvPr/>
+        </p:nvSpPr>
+        <p:spPr>
+          <a:xfrm>
+            <a:off x="914400" y="5349240"/>
+            <a:ext cx="4754880" cy="292608"/>
+          </a:xfrm>
+          <a:prstGeom prst="rect">
+            <a:avLst/>
+          </a:prstGeom>
+          <a:noFill/>
+          <a:ln/>
+        </p:spPr>
+        <p:txBody>
+          <a:bodyPr wrap="square" lIns="0" tIns="0" rIns="0" bIns="0" rtlCol="0" anchor="t"/>
+          <a:lstStyle/>
+          <a:p>
+            <a:pPr indent="0" marL="0">
+              <a:buNone/>
+            </a:pPr>
+            <a:r>
+              <a:rPr lang="en-US" sz="1150" b="1" dirty="0">
+                <a:solidFill>
+                  <a:srgbClr val="1E2761"/>
+                </a:solidFill>
+                <a:latin typeface="Calibri" pitchFamily="34" charset="0"/>
+                <a:ea typeface="Calibri" pitchFamily="34" charset="-122"/>
+                <a:cs typeface="Calibri" pitchFamily="34" charset="-120"/>
+              </a:rPr>
+              <a:t>Bulat and Tzimiropoulos, ICCV 2021</a:t>
+            </a:r>
+            <a:pPr indent="0" marL="0">
+              <a:buNone/>
+            </a:pPr>
+            <a:r>
+              <a:rPr lang="en-US" sz="1150" dirty="0">
+                <a:solidFill>
+                  <a:srgbClr val="5A6B8C"/>
+                </a:solidFill>
+                <a:latin typeface="Calibri" pitchFamily="34" charset="0"/>
+                <a:ea typeface="Calibri" pitchFamily="34" charset="-122"/>
+                <a:cs typeface="Calibri" pitchFamily="34" charset="-120"/>
+              </a:rPr>
+              <a:t>   ·   Bit-Mixer, runtime precision</a:t>
+            </a:r>
+            <a:endParaRPr lang="en-US" sz="1150" dirty="0"/>
+          </a:p>
+        </p:txBody>
+      </p:sp>
+      <p:sp>
+        <p:nvSpPr>
+          <p:cNvPr id="22" name="Shape 20"/>
+          <p:cNvSpPr/>
+          <p:nvPr/>
+        </p:nvSpPr>
+        <p:spPr>
+          <a:xfrm>
+            <a:off x="6217920" y="3767328"/>
+            <a:ext cx="5303520" cy="1965960"/>
+          </a:xfrm>
+          <a:prstGeom prst="roundRect">
+            <a:avLst>
+              <a:gd name="adj" fmla="val 4651"/>
+            </a:avLst>
+          </a:prstGeom>
+          <a:solidFill>
+            <a:srgbClr val="F4F7FC"/>
+          </a:solidFill>
+          <a:ln/>
+        </p:spPr>
+      </p:sp>
+      <p:sp>
+        <p:nvSpPr>
+          <p:cNvPr id="23" name="Text 21"/>
+          <p:cNvSpPr txBox="1"/>
+          <p:nvPr/>
+        </p:nvSpPr>
+        <p:spPr>
+          <a:xfrm>
+            <a:off x="6492240" y="3968496"/>
+            <a:ext cx="4754880" cy="329184"/>
+          </a:xfrm>
+          <a:prstGeom prst="rect">
+            <a:avLst/>
+          </a:prstGeom>
+          <a:noFill/>
+          <a:ln/>
+        </p:spPr>
+        <p:txBody>
+          <a:bodyPr wrap="square" lIns="0" tIns="0" rIns="0" bIns="0" rtlCol="0" anchor="t"/>
+          <a:lstStyle/>
+          <a:p>
+            <a:pPr indent="0" marL="0">
+              <a:buNone/>
+            </a:pPr>
+            <a:r>
+              <a:rPr lang="en-US" sz="1400" b="1" dirty="0">
+                <a:solidFill>
+                  <a:srgbClr val="12193A"/>
+                </a:solidFill>
+                <a:latin typeface="Calibri" pitchFamily="34" charset="0"/>
+                <a:ea typeface="Calibri" pitchFamily="34" charset="-122"/>
+                <a:cs typeface="Calibri" pitchFamily="34" charset="-120"/>
+              </a:rPr>
+              <a:t>Microcontroller ML and speech</a:t>
+            </a:r>
+            <a:endParaRPr lang="en-US" sz="1400" dirty="0"/>
+          </a:p>
+        </p:txBody>
+      </p:sp>
+      <p:sp>
+        <p:nvSpPr>
+          <p:cNvPr id="24" name="Text 22"/>
+          <p:cNvSpPr txBox="1"/>
+          <p:nvPr/>
+        </p:nvSpPr>
+        <p:spPr>
+          <a:xfrm>
+            <a:off x="6492240" y="4389120"/>
+            <a:ext cx="4754880" cy="292608"/>
+          </a:xfrm>
+          <a:prstGeom prst="rect">
+            <a:avLst/>
+          </a:prstGeom>
+          <a:noFill/>
+          <a:ln/>
+        </p:spPr>
+        <p:txBody>
+          <a:bodyPr wrap="square" lIns="0" tIns="0" rIns="0" bIns="0" rtlCol="0" anchor="t"/>
+          <a:lstStyle/>
+          <a:p>
+            <a:pPr indent="0" marL="0">
+              <a:buNone/>
+            </a:pPr>
+            <a:r>
+              <a:rPr lang="en-US" sz="1150" b="1" dirty="0">
+                <a:solidFill>
+                  <a:srgbClr val="1E2761"/>
+                </a:solidFill>
+                <a:latin typeface="Calibri" pitchFamily="34" charset="0"/>
+                <a:ea typeface="Calibri" pitchFamily="34" charset="-122"/>
+                <a:cs typeface="Calibri" pitchFamily="34" charset="-120"/>
+              </a:rPr>
+              <a:t>Lin et al., NeurIPS 2020</a:t>
+            </a:r>
+            <a:pPr indent="0" marL="0">
+              <a:buNone/>
+            </a:pPr>
+            <a:r>
+              <a:rPr lang="en-US" sz="1150" dirty="0">
+                <a:solidFill>
+                  <a:srgbClr val="5A6B8C"/>
+                </a:solidFill>
+                <a:latin typeface="Calibri" pitchFamily="34" charset="0"/>
+                <a:ea typeface="Calibri" pitchFamily="34" charset="-122"/>
+                <a:cs typeface="Calibri" pitchFamily="34" charset="-120"/>
+              </a:rPr>
+              <a:t>   ·   MCUNet</a:t>
+            </a:r>
+            <a:endParaRPr lang="en-US" sz="1150" dirty="0"/>
+          </a:p>
+        </p:txBody>
+      </p:sp>
+      <p:sp>
+        <p:nvSpPr>
+          <p:cNvPr id="25" name="Text 23"/>
+          <p:cNvSpPr txBox="1"/>
+          <p:nvPr/>
+        </p:nvSpPr>
+        <p:spPr>
+          <a:xfrm>
+            <a:off x="6492240" y="4709160"/>
+            <a:ext cx="4754880" cy="292608"/>
+          </a:xfrm>
+          <a:prstGeom prst="rect">
+            <a:avLst/>
+          </a:prstGeom>
+          <a:noFill/>
+          <a:ln/>
+        </p:spPr>
+        <p:txBody>
+          <a:bodyPr wrap="square" lIns="0" tIns="0" rIns="0" bIns="0" rtlCol="0" anchor="t"/>
+          <a:lstStyle/>
+          <a:p>
+            <a:pPr indent="0" marL="0">
+              <a:buNone/>
+            </a:pPr>
+            <a:r>
+              <a:rPr lang="en-US" sz="1150" b="1" dirty="0">
+                <a:solidFill>
+                  <a:srgbClr val="1E2761"/>
+                </a:solidFill>
+                <a:latin typeface="Calibri" pitchFamily="34" charset="0"/>
+                <a:ea typeface="Calibri" pitchFamily="34" charset="-122"/>
+                <a:cs typeface="Calibri" pitchFamily="34" charset="-120"/>
+              </a:rPr>
+              <a:t>David et al., MLSys 2021</a:t>
+            </a:r>
+            <a:pPr indent="0" marL="0">
+              <a:buNone/>
+            </a:pPr>
+            <a:r>
+              <a:rPr lang="en-US" sz="1150" dirty="0">
+                <a:solidFill>
+                  <a:srgbClr val="5A6B8C"/>
+                </a:solidFill>
+                <a:latin typeface="Calibri" pitchFamily="34" charset="0"/>
+                <a:ea typeface="Calibri" pitchFamily="34" charset="-122"/>
+                <a:cs typeface="Calibri" pitchFamily="34" charset="-120"/>
+              </a:rPr>
+              <a:t>   ·   TensorFlow Lite Micro</a:t>
+            </a:r>
+            <a:endParaRPr lang="en-US" sz="1150" dirty="0"/>
+          </a:p>
+        </p:txBody>
+      </p:sp>
+      <p:sp>
+        <p:nvSpPr>
+          <p:cNvPr id="26" name="Text 24"/>
+          <p:cNvSpPr txBox="1"/>
+          <p:nvPr/>
+        </p:nvSpPr>
+        <p:spPr>
+          <a:xfrm>
+            <a:off x="6492240" y="5029200"/>
+            <a:ext cx="4754880" cy="292608"/>
+          </a:xfrm>
+          <a:prstGeom prst="rect">
+            <a:avLst/>
+          </a:prstGeom>
+          <a:noFill/>
+          <a:ln/>
+        </p:spPr>
+        <p:txBody>
+          <a:bodyPr wrap="square" lIns="0" tIns="0" rIns="0" bIns="0" rtlCol="0" anchor="t"/>
+          <a:lstStyle/>
+          <a:p>
+            <a:pPr indent="0" marL="0">
+              <a:buNone/>
+            </a:pPr>
+            <a:r>
+              <a:rPr lang="en-US" sz="1150" b="1" dirty="0">
+                <a:solidFill>
+                  <a:srgbClr val="1E2761"/>
+                </a:solidFill>
+                <a:latin typeface="Calibri" pitchFamily="34" charset="0"/>
+                <a:ea typeface="Calibri" pitchFamily="34" charset="-122"/>
+                <a:cs typeface="Calibri" pitchFamily="34" charset="-120"/>
+              </a:rPr>
+              <a:t>Sainath and Parada, Interspeech 2015</a:t>
+            </a:r>
+            <a:pPr indent="0" marL="0">
+              <a:buNone/>
+            </a:pPr>
+            <a:r>
+              <a:rPr lang="en-US" sz="1150" dirty="0">
+                <a:solidFill>
+                  <a:srgbClr val="5A6B8C"/>
+                </a:solidFill>
+                <a:latin typeface="Calibri" pitchFamily="34" charset="0"/>
+                <a:ea typeface="Calibri" pitchFamily="34" charset="-122"/>
+                <a:cs typeface="Calibri" pitchFamily="34" charset="-120"/>
+              </a:rPr>
+              <a:t>   ·   CNN keyword spotting</a:t>
+            </a:r>
+            <a:endParaRPr lang="en-US" sz="1150" dirty="0"/>
+          </a:p>
+        </p:txBody>
+      </p:sp>
+      <p:sp>
+        <p:nvSpPr>
+          <p:cNvPr id="27" name="Text 25"/>
+          <p:cNvSpPr txBox="1"/>
+          <p:nvPr/>
+        </p:nvSpPr>
+        <p:spPr>
+          <a:xfrm>
+            <a:off x="6492240" y="5349240"/>
+            <a:ext cx="4754880" cy="292608"/>
+          </a:xfrm>
+          <a:prstGeom prst="rect">
+            <a:avLst/>
+          </a:prstGeom>
+          <a:noFill/>
+          <a:ln/>
+        </p:spPr>
+        <p:txBody>
+          <a:bodyPr wrap="square" lIns="0" tIns="0" rIns="0" bIns="0" rtlCol="0" anchor="t"/>
+          <a:lstStyle/>
+          <a:p>
+            <a:pPr indent="0" marL="0">
+              <a:buNone/>
+            </a:pPr>
+            <a:r>
+              <a:rPr lang="en-US" sz="1150" b="1" dirty="0">
+                <a:solidFill>
+                  <a:srgbClr val="1E2761"/>
+                </a:solidFill>
+                <a:latin typeface="Calibri" pitchFamily="34" charset="0"/>
+                <a:ea typeface="Calibri" pitchFamily="34" charset="-122"/>
+                <a:cs typeface="Calibri" pitchFamily="34" charset="-120"/>
+              </a:rPr>
+              <a:t>Horowitz, ISSCC 2014</a:t>
+            </a:r>
+            <a:pPr indent="0" marL="0">
+              <a:buNone/>
+            </a:pPr>
+            <a:r>
+              <a:rPr lang="en-US" sz="1150" dirty="0">
+                <a:solidFill>
+                  <a:srgbClr val="5A6B8C"/>
+                </a:solidFill>
+                <a:latin typeface="Calibri" pitchFamily="34" charset="0"/>
+                <a:ea typeface="Calibri" pitchFamily="34" charset="-122"/>
+                <a:cs typeface="Calibri" pitchFamily="34" charset="-120"/>
+              </a:rPr>
+              <a:t>   ·   the energy cost of computing</a:t>
+            </a:r>
+            <a:endParaRPr lang="en-US" sz="1150" dirty="0"/>
+          </a:p>
+        </p:txBody>
+      </p:sp>
+      <p:sp>
+        <p:nvSpPr>
+          <p:cNvPr id="28" name="Text 26"/>
+          <p:cNvSpPr txBox="1"/>
+          <p:nvPr/>
+        </p:nvSpPr>
+        <p:spPr>
+          <a:xfrm>
+            <a:off x="640080" y="6053328"/>
+            <a:ext cx="10881360" cy="329184"/>
+          </a:xfrm>
+          <a:prstGeom prst="rect">
+            <a:avLst/>
+          </a:prstGeom>
+          <a:noFill/>
+          <a:ln/>
+        </p:spPr>
+        <p:txBody>
+          <a:bodyPr wrap="square" lIns="0" tIns="0" rIns="0" bIns="0" rtlCol="0" anchor="t"/>
+          <a:lstStyle/>
+          <a:p>
+            <a:pPr indent="0" marL="0">
+              <a:buNone/>
+            </a:pPr>
+            <a:r>
+              <a:rPr lang="en-US" sz="1300" i="1" dirty="0">
+                <a:solidFill>
+                  <a:srgbClr val="8FA2C4"/>
+                </a:solidFill>
+                <a:latin typeface="Calibri" pitchFamily="34" charset="0"/>
+                <a:ea typeface="Calibri" pitchFamily="34" charset="-122"/>
+                <a:cs typeface="Calibri" pitchFamily="34" charset="-120"/>
+              </a:rPr>
+              <a:t>Sixteen of the sixty journal and conference references listed with their DOIs in the README.</a:t>
+            </a:r>
+            <a:endParaRPr lang="en-US" sz="1300" dirty="0"/>
+          </a:p>
+        </p:txBody>
+      </p:sp>
+    </p:spTree>
+  </p:cSld>
+  <p:clrMapOvr>
+    <a:masterClrMapping/>
+  </p:clrMapOvr>
+</p:sld>
+</file>
+
+<file path=ppt/slides/slide12.xml><?xml version="1.0" encoding="utf-8"?>
+<p:sld xmlns:a="http://schemas.openxmlformats.org/drawingml/2006/main" xmlns:r="http://schemas.openxmlformats.org/officeDocument/2006/relationships" xmlns:p="http://schemas.openxmlformats.org/presentationml/2006/main">
+  <p:cSld name="Slide 12">
+    <p:bg>
+      <p:bgPr>
+        <a:solidFill>
           <a:srgbClr val="1E2761"/>
         </a:solidFill>
       </p:bgPr>
@@ -3478,7 +4808,7 @@
         </p:nvSpPr>
         <p:spPr>
           <a:xfrm>
-            <a:off x="640080" y="5440680"/>
+            <a:off x="640080" y="5559552"/>
             <a:ext cx="10881360" cy="365760"/>
           </a:xfrm>
           <a:prstGeom prst="rect">
@@ -3503,7 +4833,7 @@
                 <a:ea typeface="Calibri" pitchFamily="34" charset="-122"/>
                 <a:cs typeface="Calibri" pitchFamily="34" charset="-120"/>
               </a:rPr>
-              <a:t>github.com/kushal-script/utkernel-rtos-adaptive-kws</a:t>
+              <a:t>github.com/kushal-script/utkernel-rtos-adaptive-edge-ai</a:t>
             </a:r>
             <a:endParaRPr lang="en-US" sz="1600" dirty="0"/>
           </a:p>
@@ -3517,7 +4847,7 @@
         </p:nvSpPr>
         <p:spPr>
           <a:xfrm>
-            <a:off x="640080" y="5870448"/>
+            <a:off x="640080" y="5989320"/>
             <a:ext cx="10881360" cy="365760"/>
           </a:xfrm>
           <a:prstGeom prst="rect">
